--- a/Pregrado/Trabajo de grado 2/Clases/Sesion 07 - Diseño metodológico (propuesto)/Presentacion.pptx
+++ b/Pregrado/Trabajo de grado 2/Clases/Sesion 07 - Diseño metodológico (propuesto)/Presentacion.pptx
@@ -3365,41 +3365,6 @@
           </a:p>
         </p:txBody>
       </p:sp>
-      <p:sp>
-        <p:nvSpPr>
-          <p:cNvPr id="7" name="TextBox 6"/>
-          <p:cNvSpPr txBox="1"/>
-          <p:nvPr/>
-        </p:nvSpPr>
-        <p:spPr>
-          <a:xfrm>
-            <a:off x="2194560" y="6446520"/>
-            <a:ext cx="5943600" cy="274320"/>
-          </a:xfrm>
-          <a:prstGeom prst="rect">
-            <a:avLst/>
-          </a:prstGeom>
-          <a:noFill/>
-        </p:spPr>
-        <p:txBody>
-          <a:bodyPr wrap="square" anchor="t" lIns="0" rIns="0" tIns="0" bIns="0">
-            <a:spAutoFit/>
-          </a:bodyPr>
-          <a:lstStyle/>
-          <a:p>
-            <a:pPr algn="l"/>
-            <a:r>
-              <a:rPr sz="1000" b="1" i="0">
-                <a:solidFill>
-                  <a:srgbClr val="8F989D"/>
-                </a:solidFill>
-                <a:latin typeface="Calibri"/>
-              </a:rPr>
-              <a:t>Inicio 5:10 pm</a:t>
-            </a:r>
-          </a:p>
-        </p:txBody>
-      </p:sp>
     </p:spTree>
   </p:cSld>
   <p:clrMapOvr>
@@ -3738,41 +3703,6 @@
         </p:nvSpPr>
         <p:spPr>
           <a:xfrm>
-            <a:off x="2194560" y="6446520"/>
-            <a:ext cx="5943600" cy="274320"/>
-          </a:xfrm>
-          <a:prstGeom prst="rect">
-            <a:avLst/>
-          </a:prstGeom>
-          <a:noFill/>
-        </p:spPr>
-        <p:txBody>
-          <a:bodyPr wrap="square" anchor="t" lIns="0" rIns="0" tIns="0" bIns="0">
-            <a:spAutoFit/>
-          </a:bodyPr>
-          <a:lstStyle/>
-          <a:p>
-            <a:pPr algn="l"/>
-            <a:r>
-              <a:rPr sz="1000" b="1" i="0">
-                <a:solidFill>
-                  <a:srgbClr val="8F989D"/>
-                </a:solidFill>
-                <a:latin typeface="Calibri"/>
-              </a:rPr>
-              <a:t>Inicio 5:10 pm</a:t>
-            </a:r>
-          </a:p>
-        </p:txBody>
-      </p:sp>
-      <p:sp>
-        <p:nvSpPr>
-          <p:cNvPr id="6" name="TextBox 5"/>
-          <p:cNvSpPr txBox="1"/>
-          <p:nvPr/>
-        </p:nvSpPr>
-        <p:spPr>
-          <a:xfrm>
             <a:off x="11094415" y="6446520"/>
             <a:ext cx="548640" cy="274320"/>
           </a:xfrm>
@@ -3802,7 +3732,7 @@
       </p:sp>
       <p:sp>
         <p:nvSpPr>
-          <p:cNvPr id="7" name="TextBox 6"/>
+          <p:cNvPr id="6" name="TextBox 5"/>
           <p:cNvSpPr txBox="1"/>
           <p:nvPr/>
         </p:nvSpPr>
@@ -4283,41 +4213,6 @@
         </p:nvSpPr>
         <p:spPr>
           <a:xfrm>
-            <a:off x="2194560" y="6446520"/>
-            <a:ext cx="5943600" cy="274320"/>
-          </a:xfrm>
-          <a:prstGeom prst="rect">
-            <a:avLst/>
-          </a:prstGeom>
-          <a:noFill/>
-        </p:spPr>
-        <p:txBody>
-          <a:bodyPr wrap="square" anchor="t" lIns="0" rIns="0" tIns="0" bIns="0">
-            <a:spAutoFit/>
-          </a:bodyPr>
-          <a:lstStyle/>
-          <a:p>
-            <a:pPr algn="l"/>
-            <a:r>
-              <a:rPr sz="1000" b="1" i="0">
-                <a:solidFill>
-                  <a:srgbClr val="8F989D"/>
-                </a:solidFill>
-                <a:latin typeface="Calibri"/>
-              </a:rPr>
-              <a:t>Inicio 5:10 pm</a:t>
-            </a:r>
-          </a:p>
-        </p:txBody>
-      </p:sp>
-      <p:sp>
-        <p:nvSpPr>
-          <p:cNvPr id="11" name="TextBox 10"/>
-          <p:cNvSpPr txBox="1"/>
-          <p:nvPr/>
-        </p:nvSpPr>
-        <p:spPr>
-          <a:xfrm>
             <a:off x="11094415" y="6446520"/>
             <a:ext cx="548640" cy="274320"/>
           </a:xfrm>
@@ -4570,41 +4465,6 @@
         </p:nvSpPr>
         <p:spPr>
           <a:xfrm>
-            <a:off x="2194560" y="6446520"/>
-            <a:ext cx="5943600" cy="274320"/>
-          </a:xfrm>
-          <a:prstGeom prst="rect">
-            <a:avLst/>
-          </a:prstGeom>
-          <a:noFill/>
-        </p:spPr>
-        <p:txBody>
-          <a:bodyPr wrap="square" anchor="t" lIns="0" rIns="0" tIns="0" bIns="0">
-            <a:spAutoFit/>
-          </a:bodyPr>
-          <a:lstStyle/>
-          <a:p>
-            <a:pPr algn="l"/>
-            <a:r>
-              <a:rPr sz="1000" b="1" i="0">
-                <a:solidFill>
-                  <a:srgbClr val="8F989D"/>
-                </a:solidFill>
-                <a:latin typeface="Calibri"/>
-              </a:rPr>
-              <a:t>Inicio 5:10 pm</a:t>
-            </a:r>
-          </a:p>
-        </p:txBody>
-      </p:sp>
-      <p:sp>
-        <p:nvSpPr>
-          <p:cNvPr id="7" name="TextBox 6"/>
-          <p:cNvSpPr txBox="1"/>
-          <p:nvPr/>
-        </p:nvSpPr>
-        <p:spPr>
-          <a:xfrm>
             <a:off x="11094415" y="6446520"/>
             <a:ext cx="548640" cy="274320"/>
           </a:xfrm>
@@ -5184,41 +5044,6 @@
         </p:nvSpPr>
         <p:spPr>
           <a:xfrm>
-            <a:off x="2194560" y="6446520"/>
-            <a:ext cx="5943600" cy="274320"/>
-          </a:xfrm>
-          <a:prstGeom prst="rect">
-            <a:avLst/>
-          </a:prstGeom>
-          <a:noFill/>
-        </p:spPr>
-        <p:txBody>
-          <a:bodyPr wrap="square" anchor="t" lIns="0" rIns="0" tIns="0" bIns="0">
-            <a:spAutoFit/>
-          </a:bodyPr>
-          <a:lstStyle/>
-          <a:p>
-            <a:pPr algn="l"/>
-            <a:r>
-              <a:rPr sz="1000" b="1" i="0">
-                <a:solidFill>
-                  <a:srgbClr val="8F989D"/>
-                </a:solidFill>
-                <a:latin typeface="Calibri"/>
-              </a:rPr>
-              <a:t>Inicio 5:10 pm</a:t>
-            </a:r>
-          </a:p>
-        </p:txBody>
-      </p:sp>
-      <p:sp>
-        <p:nvSpPr>
-          <p:cNvPr id="6" name="TextBox 5"/>
-          <p:cNvSpPr txBox="1"/>
-          <p:nvPr/>
-        </p:nvSpPr>
-        <p:spPr>
-          <a:xfrm>
             <a:off x="11094415" y="6446520"/>
             <a:ext cx="548640" cy="274320"/>
           </a:xfrm>
@@ -5248,7 +5073,7 @@
       </p:sp>
       <p:sp>
         <p:nvSpPr>
-          <p:cNvPr id="7" name="TextBox 6"/>
+          <p:cNvPr id="6" name="TextBox 5"/>
           <p:cNvSpPr txBox="1"/>
           <p:nvPr/>
         </p:nvSpPr>
@@ -5760,41 +5585,6 @@
         </p:nvSpPr>
         <p:spPr>
           <a:xfrm>
-            <a:off x="2194560" y="6446520"/>
-            <a:ext cx="5943600" cy="274320"/>
-          </a:xfrm>
-          <a:prstGeom prst="rect">
-            <a:avLst/>
-          </a:prstGeom>
-          <a:noFill/>
-        </p:spPr>
-        <p:txBody>
-          <a:bodyPr wrap="square" anchor="t" lIns="0" rIns="0" tIns="0" bIns="0">
-            <a:spAutoFit/>
-          </a:bodyPr>
-          <a:lstStyle/>
-          <a:p>
-            <a:pPr algn="l"/>
-            <a:r>
-              <a:rPr sz="1000" b="1" i="0">
-                <a:solidFill>
-                  <a:srgbClr val="8F989D"/>
-                </a:solidFill>
-                <a:latin typeface="Calibri"/>
-              </a:rPr>
-              <a:t>Inicio 5:10 pm</a:t>
-            </a:r>
-          </a:p>
-        </p:txBody>
-      </p:sp>
-      <p:sp>
-        <p:nvSpPr>
-          <p:cNvPr id="6" name="TextBox 5"/>
-          <p:cNvSpPr txBox="1"/>
-          <p:nvPr/>
-        </p:nvSpPr>
-        <p:spPr>
-          <a:xfrm>
             <a:off x="11094415" y="6446520"/>
             <a:ext cx="548640" cy="274320"/>
           </a:xfrm>
@@ -6268,41 +6058,6 @@
         </p:nvSpPr>
         <p:spPr>
           <a:xfrm>
-            <a:off x="2194560" y="6446520"/>
-            <a:ext cx="5943600" cy="274320"/>
-          </a:xfrm>
-          <a:prstGeom prst="rect">
-            <a:avLst/>
-          </a:prstGeom>
-          <a:noFill/>
-        </p:spPr>
-        <p:txBody>
-          <a:bodyPr wrap="square" anchor="t" lIns="0" rIns="0" tIns="0" bIns="0">
-            <a:spAutoFit/>
-          </a:bodyPr>
-          <a:lstStyle/>
-          <a:p>
-            <a:pPr algn="l"/>
-            <a:r>
-              <a:rPr sz="1000" b="1" i="0">
-                <a:solidFill>
-                  <a:srgbClr val="8F989D"/>
-                </a:solidFill>
-                <a:latin typeface="Calibri"/>
-              </a:rPr>
-              <a:t>Inicio 5:10 pm</a:t>
-            </a:r>
-          </a:p>
-        </p:txBody>
-      </p:sp>
-      <p:sp>
-        <p:nvSpPr>
-          <p:cNvPr id="6" name="TextBox 5"/>
-          <p:cNvSpPr txBox="1"/>
-          <p:nvPr/>
-        </p:nvSpPr>
-        <p:spPr>
-          <a:xfrm>
             <a:off x="11094415" y="6446520"/>
             <a:ext cx="548640" cy="274320"/>
           </a:xfrm>
@@ -6594,41 +6349,6 @@
         </p:nvSpPr>
         <p:spPr>
           <a:xfrm>
-            <a:off x="2194560" y="6446520"/>
-            <a:ext cx="5943600" cy="274320"/>
-          </a:xfrm>
-          <a:prstGeom prst="rect">
-            <a:avLst/>
-          </a:prstGeom>
-          <a:noFill/>
-        </p:spPr>
-        <p:txBody>
-          <a:bodyPr wrap="square" anchor="t" lIns="0" rIns="0" tIns="0" bIns="0">
-            <a:spAutoFit/>
-          </a:bodyPr>
-          <a:lstStyle/>
-          <a:p>
-            <a:pPr algn="l"/>
-            <a:r>
-              <a:rPr sz="1000" b="1" i="0">
-                <a:solidFill>
-                  <a:srgbClr val="8F989D"/>
-                </a:solidFill>
-                <a:latin typeface="Calibri"/>
-              </a:rPr>
-              <a:t>Inicio 5:10 pm</a:t>
-            </a:r>
-          </a:p>
-        </p:txBody>
-      </p:sp>
-      <p:sp>
-        <p:nvSpPr>
-          <p:cNvPr id="6" name="TextBox 5"/>
-          <p:cNvSpPr txBox="1"/>
-          <p:nvPr/>
-        </p:nvSpPr>
-        <p:spPr>
-          <a:xfrm>
             <a:off x="11094415" y="6446520"/>
             <a:ext cx="548640" cy="274320"/>
           </a:xfrm>
@@ -6942,41 +6662,6 @@
         </p:nvSpPr>
         <p:spPr>
           <a:xfrm>
-            <a:off x="2194560" y="6446520"/>
-            <a:ext cx="5943600" cy="274320"/>
-          </a:xfrm>
-          <a:prstGeom prst="rect">
-            <a:avLst/>
-          </a:prstGeom>
-          <a:noFill/>
-        </p:spPr>
-        <p:txBody>
-          <a:bodyPr wrap="square" anchor="t" lIns="0" rIns="0" tIns="0" bIns="0">
-            <a:spAutoFit/>
-          </a:bodyPr>
-          <a:lstStyle/>
-          <a:p>
-            <a:pPr algn="l"/>
-            <a:r>
-              <a:rPr sz="1000" b="1" i="0">
-                <a:solidFill>
-                  <a:srgbClr val="8F989D"/>
-                </a:solidFill>
-                <a:latin typeface="Calibri"/>
-              </a:rPr>
-              <a:t>Inicio 5:10 pm</a:t>
-            </a:r>
-          </a:p>
-        </p:txBody>
-      </p:sp>
-      <p:sp>
-        <p:nvSpPr>
-          <p:cNvPr id="6" name="TextBox 5"/>
-          <p:cNvSpPr txBox="1"/>
-          <p:nvPr/>
-        </p:nvSpPr>
-        <p:spPr>
-          <a:xfrm>
             <a:off x="11094415" y="6446520"/>
             <a:ext cx="548640" cy="274320"/>
           </a:xfrm>
@@ -7223,41 +6908,6 @@
           </a:p>
         </p:txBody>
       </p:sp>
-      <p:sp>
-        <p:nvSpPr>
-          <p:cNvPr id="7" name="TextBox 6"/>
-          <p:cNvSpPr txBox="1"/>
-          <p:nvPr/>
-        </p:nvSpPr>
-        <p:spPr>
-          <a:xfrm>
-            <a:off x="2194560" y="6446520"/>
-            <a:ext cx="5943600" cy="274320"/>
-          </a:xfrm>
-          <a:prstGeom prst="rect">
-            <a:avLst/>
-          </a:prstGeom>
-          <a:noFill/>
-        </p:spPr>
-        <p:txBody>
-          <a:bodyPr wrap="square" anchor="t" lIns="0" rIns="0" tIns="0" bIns="0">
-            <a:spAutoFit/>
-          </a:bodyPr>
-          <a:lstStyle/>
-          <a:p>
-            <a:pPr algn="l"/>
-            <a:r>
-              <a:rPr sz="1000" b="1" i="0">
-                <a:solidFill>
-                  <a:srgbClr val="8F989D"/>
-                </a:solidFill>
-                <a:latin typeface="Calibri"/>
-              </a:rPr>
-              <a:t>Inicio 5:10 pm</a:t>
-            </a:r>
-          </a:p>
-        </p:txBody>
-      </p:sp>
     </p:spTree>
   </p:cSld>
   <p:clrMapOvr>
@@ -7587,41 +7237,6 @@
         </p:nvSpPr>
         <p:spPr>
           <a:xfrm>
-            <a:off x="2194560" y="6446520"/>
-            <a:ext cx="5943600" cy="274320"/>
-          </a:xfrm>
-          <a:prstGeom prst="rect">
-            <a:avLst/>
-          </a:prstGeom>
-          <a:noFill/>
-        </p:spPr>
-        <p:txBody>
-          <a:bodyPr wrap="square" anchor="t" lIns="0" rIns="0" tIns="0" bIns="0">
-            <a:spAutoFit/>
-          </a:bodyPr>
-          <a:lstStyle/>
-          <a:p>
-            <a:pPr algn="l"/>
-            <a:r>
-              <a:rPr sz="1000" b="1" i="0">
-                <a:solidFill>
-                  <a:srgbClr val="8F989D"/>
-                </a:solidFill>
-                <a:latin typeface="Calibri"/>
-              </a:rPr>
-              <a:t>Inicio 5:10 pm</a:t>
-            </a:r>
-          </a:p>
-        </p:txBody>
-      </p:sp>
-      <p:sp>
-        <p:nvSpPr>
-          <p:cNvPr id="6" name="TextBox 5"/>
-          <p:cNvSpPr txBox="1"/>
-          <p:nvPr/>
-        </p:nvSpPr>
-        <p:spPr>
-          <a:xfrm>
             <a:off x="11094415" y="6446520"/>
             <a:ext cx="548640" cy="274320"/>
           </a:xfrm>
@@ -7651,7 +7266,7 @@
       </p:sp>
       <p:sp>
         <p:nvSpPr>
-          <p:cNvPr id="7" name="TextBox 6"/>
+          <p:cNvPr id="6" name="TextBox 5"/>
           <p:cNvSpPr txBox="1"/>
           <p:nvPr/>
         </p:nvSpPr>
@@ -8016,41 +7631,6 @@
       <p:sp>
         <p:nvSpPr>
           <p:cNvPr id="5" name="TextBox 4"/>
-          <p:cNvSpPr txBox="1"/>
-          <p:nvPr/>
-        </p:nvSpPr>
-        <p:spPr>
-          <a:xfrm>
-            <a:off x="2194560" y="6446520"/>
-            <a:ext cx="5943600" cy="274320"/>
-          </a:xfrm>
-          <a:prstGeom prst="rect">
-            <a:avLst/>
-          </a:prstGeom>
-          <a:noFill/>
-        </p:spPr>
-        <p:txBody>
-          <a:bodyPr wrap="square" anchor="t" lIns="0" rIns="0" tIns="0" bIns="0">
-            <a:spAutoFit/>
-          </a:bodyPr>
-          <a:lstStyle/>
-          <a:p>
-            <a:pPr algn="l"/>
-            <a:r>
-              <a:rPr sz="1000" b="1" i="0">
-                <a:solidFill>
-                  <a:srgbClr val="8F989D"/>
-                </a:solidFill>
-                <a:latin typeface="Calibri"/>
-              </a:rPr>
-              <a:t>Inicio 5:10 pm</a:t>
-            </a:r>
-          </a:p>
-        </p:txBody>
-      </p:sp>
-      <p:sp>
-        <p:nvSpPr>
-          <p:cNvPr id="6" name="TextBox 5"/>
           <p:cNvSpPr txBox="1"/>
           <p:nvPr/>
         </p:nvSpPr>
@@ -8822,41 +8402,6 @@
         </p:nvSpPr>
         <p:spPr>
           <a:xfrm>
-            <a:off x="2194560" y="6446520"/>
-            <a:ext cx="5943600" cy="274320"/>
-          </a:xfrm>
-          <a:prstGeom prst="rect">
-            <a:avLst/>
-          </a:prstGeom>
-          <a:noFill/>
-        </p:spPr>
-        <p:txBody>
-          <a:bodyPr wrap="square" anchor="t" lIns="0" rIns="0" tIns="0" bIns="0">
-            <a:spAutoFit/>
-          </a:bodyPr>
-          <a:lstStyle/>
-          <a:p>
-            <a:pPr algn="l"/>
-            <a:r>
-              <a:rPr sz="1000" b="1" i="0">
-                <a:solidFill>
-                  <a:srgbClr val="8F989D"/>
-                </a:solidFill>
-                <a:latin typeface="Calibri"/>
-              </a:rPr>
-              <a:t>Inicio 5:10 pm</a:t>
-            </a:r>
-          </a:p>
-        </p:txBody>
-      </p:sp>
-      <p:sp>
-        <p:nvSpPr>
-          <p:cNvPr id="7" name="TextBox 6"/>
-          <p:cNvSpPr txBox="1"/>
-          <p:nvPr/>
-        </p:nvSpPr>
-        <p:spPr>
-          <a:xfrm>
             <a:off x="11094415" y="6446520"/>
             <a:ext cx="548640" cy="274320"/>
           </a:xfrm>
@@ -9623,41 +9168,6 @@
         </p:nvSpPr>
         <p:spPr>
           <a:xfrm>
-            <a:off x="2194560" y="6446520"/>
-            <a:ext cx="5943600" cy="274320"/>
-          </a:xfrm>
-          <a:prstGeom prst="rect">
-            <a:avLst/>
-          </a:prstGeom>
-          <a:noFill/>
-        </p:spPr>
-        <p:txBody>
-          <a:bodyPr wrap="square" anchor="t" lIns="0" rIns="0" tIns="0" bIns="0">
-            <a:spAutoFit/>
-          </a:bodyPr>
-          <a:lstStyle/>
-          <a:p>
-            <a:pPr algn="l"/>
-            <a:r>
-              <a:rPr sz="1000" b="1" i="0">
-                <a:solidFill>
-                  <a:srgbClr val="8F989D"/>
-                </a:solidFill>
-                <a:latin typeface="Calibri"/>
-              </a:rPr>
-              <a:t>Inicio 5:10 pm</a:t>
-            </a:r>
-          </a:p>
-        </p:txBody>
-      </p:sp>
-      <p:sp>
-        <p:nvSpPr>
-          <p:cNvPr id="7" name="TextBox 6"/>
-          <p:cNvSpPr txBox="1"/>
-          <p:nvPr/>
-        </p:nvSpPr>
-        <p:spPr>
-          <a:xfrm>
             <a:off x="11094415" y="6446520"/>
             <a:ext cx="548640" cy="274320"/>
           </a:xfrm>
@@ -10039,41 +9549,6 @@
         </p:nvSpPr>
         <p:spPr>
           <a:xfrm>
-            <a:off x="2194560" y="6446520"/>
-            <a:ext cx="5943600" cy="274320"/>
-          </a:xfrm>
-          <a:prstGeom prst="rect">
-            <a:avLst/>
-          </a:prstGeom>
-          <a:noFill/>
-        </p:spPr>
-        <p:txBody>
-          <a:bodyPr wrap="square" anchor="t" lIns="0" rIns="0" tIns="0" bIns="0">
-            <a:spAutoFit/>
-          </a:bodyPr>
-          <a:lstStyle/>
-          <a:p>
-            <a:pPr algn="l"/>
-            <a:r>
-              <a:rPr sz="1000" b="1" i="0">
-                <a:solidFill>
-                  <a:srgbClr val="8F989D"/>
-                </a:solidFill>
-                <a:latin typeface="Calibri"/>
-              </a:rPr>
-              <a:t>Inicio 5:10 pm</a:t>
-            </a:r>
-          </a:p>
-        </p:txBody>
-      </p:sp>
-      <p:sp>
-        <p:nvSpPr>
-          <p:cNvPr id="6" name="TextBox 5"/>
-          <p:cNvSpPr txBox="1"/>
-          <p:nvPr/>
-        </p:nvSpPr>
-        <p:spPr>
-          <a:xfrm>
             <a:off x="11094415" y="6446520"/>
             <a:ext cx="548640" cy="274320"/>
           </a:xfrm>
@@ -10103,7 +9578,7 @@
       </p:sp>
       <p:sp>
         <p:nvSpPr>
-          <p:cNvPr id="7" name="TextBox 6"/>
+          <p:cNvPr id="6" name="TextBox 5"/>
           <p:cNvSpPr txBox="1"/>
           <p:nvPr/>
         </p:nvSpPr>
@@ -10507,41 +9982,6 @@
         </p:nvSpPr>
         <p:spPr>
           <a:xfrm>
-            <a:off x="2194560" y="6446520"/>
-            <a:ext cx="5943600" cy="274320"/>
-          </a:xfrm>
-          <a:prstGeom prst="rect">
-            <a:avLst/>
-          </a:prstGeom>
-          <a:noFill/>
-        </p:spPr>
-        <p:txBody>
-          <a:bodyPr wrap="square" anchor="t" lIns="0" rIns="0" tIns="0" bIns="0">
-            <a:spAutoFit/>
-          </a:bodyPr>
-          <a:lstStyle/>
-          <a:p>
-            <a:pPr algn="l"/>
-            <a:r>
-              <a:rPr sz="1000" b="1" i="0">
-                <a:solidFill>
-                  <a:srgbClr val="8F989D"/>
-                </a:solidFill>
-                <a:latin typeface="Calibri"/>
-              </a:rPr>
-              <a:t>Inicio 5:10 pm</a:t>
-            </a:r>
-          </a:p>
-        </p:txBody>
-      </p:sp>
-      <p:sp>
-        <p:nvSpPr>
-          <p:cNvPr id="6" name="TextBox 5"/>
-          <p:cNvSpPr txBox="1"/>
-          <p:nvPr/>
-        </p:nvSpPr>
-        <p:spPr>
-          <a:xfrm>
             <a:off x="11094415" y="6446520"/>
             <a:ext cx="548640" cy="274320"/>
           </a:xfrm>
@@ -10938,41 +10378,6 @@
       <p:sp>
         <p:nvSpPr>
           <p:cNvPr id="5" name="TextBox 4"/>
-          <p:cNvSpPr txBox="1"/>
-          <p:nvPr/>
-        </p:nvSpPr>
-        <p:spPr>
-          <a:xfrm>
-            <a:off x="2194560" y="6446520"/>
-            <a:ext cx="5943600" cy="274320"/>
-          </a:xfrm>
-          <a:prstGeom prst="rect">
-            <a:avLst/>
-          </a:prstGeom>
-          <a:noFill/>
-        </p:spPr>
-        <p:txBody>
-          <a:bodyPr wrap="square" anchor="t" lIns="0" rIns="0" tIns="0" bIns="0">
-            <a:spAutoFit/>
-          </a:bodyPr>
-          <a:lstStyle/>
-          <a:p>
-            <a:pPr algn="l"/>
-            <a:r>
-              <a:rPr sz="1000" b="1" i="0">
-                <a:solidFill>
-                  <a:srgbClr val="8F989D"/>
-                </a:solidFill>
-                <a:latin typeface="Calibri"/>
-              </a:rPr>
-              <a:t>Inicio 5:10 pm</a:t>
-            </a:r>
-          </a:p>
-        </p:txBody>
-      </p:sp>
-      <p:sp>
-        <p:nvSpPr>
-          <p:cNvPr id="6" name="TextBox 5"/>
           <p:cNvSpPr txBox="1"/>
           <p:nvPr/>
         </p:nvSpPr>
@@ -11556,41 +10961,6 @@
         </p:nvSpPr>
         <p:spPr>
           <a:xfrm>
-            <a:off x="2194560" y="6446520"/>
-            <a:ext cx="5943600" cy="274320"/>
-          </a:xfrm>
-          <a:prstGeom prst="rect">
-            <a:avLst/>
-          </a:prstGeom>
-          <a:noFill/>
-        </p:spPr>
-        <p:txBody>
-          <a:bodyPr wrap="square" anchor="t" lIns="0" rIns="0" tIns="0" bIns="0">
-            <a:spAutoFit/>
-          </a:bodyPr>
-          <a:lstStyle/>
-          <a:p>
-            <a:pPr algn="l"/>
-            <a:r>
-              <a:rPr sz="1000" b="1" i="0">
-                <a:solidFill>
-                  <a:srgbClr val="8F989D"/>
-                </a:solidFill>
-                <a:latin typeface="Calibri"/>
-              </a:rPr>
-              <a:t>Inicio 5:10 pm</a:t>
-            </a:r>
-          </a:p>
-        </p:txBody>
-      </p:sp>
-      <p:sp>
-        <p:nvSpPr>
-          <p:cNvPr id="7" name="TextBox 6"/>
-          <p:cNvSpPr txBox="1"/>
-          <p:nvPr/>
-        </p:nvSpPr>
-        <p:spPr>
-          <a:xfrm>
             <a:off x="11094415" y="6446520"/>
             <a:ext cx="548640" cy="274320"/>
           </a:xfrm>

--- a/Pregrado/Trabajo de grado 2/Clases/Sesion 07 - Diseño metodológico (propuesto)/Presentacion.pptx
+++ b/Pregrado/Trabajo de grado 2/Clases/Sesion 07 - Diseño metodológico (propuesto)/Presentacion.pptx
@@ -23,6 +23,8 @@
     <p:sldId id="271" r:id="rId22"/>
     <p:sldId id="272" r:id="rId23"/>
     <p:sldId id="273" r:id="rId24"/>
+    <p:sldId id="274" r:id="rId25"/>
+    <p:sldId id="275" r:id="rId26"/>
   </p:sldIdLst>
   <p:sldSz cx="12191695" cy="6858000" type="screen4x3"/>
   <p:notesSz cx="6858000" cy="9144000"/>
@@ -5013,7 +5015,7 @@
                 </a:solidFill>
                 <a:latin typeface="Calibri"/>
               </a:rPr>
-              <a:t> Suba el archivo al espacio de la sesión en </a:t>
+              <a:t> Guarde el archivo en su Drive y tráigalo a la próxima sesión: este avance </a:t>
             </a:r>
             <a:r>
               <a:rPr sz="1600" b="1" i="0">
@@ -5022,16 +5024,34 @@
                 </a:solidFill>
                 <a:latin typeface="Calibri"/>
               </a:rPr>
-              <a:t>CDigital</a:t>
-            </a:r>
-            <a:r>
-              <a:rPr sz="1600" b="0" i="0">
-                <a:solidFill>
-                  <a:srgbClr val="2B2B2B"/>
-                </a:solidFill>
-                <a:latin typeface="Calibri"/>
-              </a:rPr>
-              <a:t> — [URL CDigital — campus del curso pendiente].</a:t>
+              <a:t>no se sube</a:t>
+            </a:r>
+            <a:r>
+              <a:rPr sz="1600" b="0" i="0">
+                <a:solidFill>
+                  <a:srgbClr val="2B2B2B"/>
+                </a:solidFill>
+                <a:latin typeface="Calibri"/>
+              </a:rPr>
+              <a:t>. Lo que recibe https://cdigital.cun.edu.co/course/view.php?id=129268 es la </a:t>
+            </a:r>
+            <a:r>
+              <a:rPr sz="1600" b="1" i="0">
+                <a:solidFill>
+                  <a:srgbClr val="2B2B2B"/>
+                </a:solidFill>
+                <a:latin typeface="Calibri"/>
+              </a:rPr>
+              <a:t>ACA Final</a:t>
+            </a:r>
+            <a:r>
+              <a:rPr sz="1600" b="0" i="0">
+                <a:solidFill>
+                  <a:srgbClr val="2B2B2B"/>
+                </a:solidFill>
+                <a:latin typeface="Calibri"/>
+              </a:rPr>
+              <a:t>, y este es uno de sus insumos.</a:t>
             </a:r>
           </a:p>
         </p:txBody>
@@ -5712,7 +5732,7 @@
                 </a:solidFill>
                 <a:latin typeface="Calibri"/>
               </a:rPr>
-              <a:t>TALLER — Ficha metodológica y matriz de coherencia</a:t>
+              <a:t>TALLER · Ficha metodológica y matriz de coherencia</a:t>
             </a:r>
           </a:p>
         </p:txBody>
@@ -5725,8 +5745,8 @@
         </p:nvSpPr>
         <p:spPr>
           <a:xfrm>
-            <a:off x="640080" y="1691639"/>
-            <a:ext cx="10911535" cy="4617720"/>
+            <a:off x="640080" y="1280160"/>
+            <a:ext cx="10911535" cy="411480"/>
           </a:xfrm>
           <a:prstGeom prst="rect">
             <a:avLst/>
@@ -5739,6 +5759,41 @@
           </a:bodyPr>
           <a:lstStyle/>
           <a:p>
+            <a:pPr algn="ctr"/>
+            <a:r>
+              <a:rPr sz="1500" b="0" i="0">
+                <a:solidFill>
+                  <a:srgbClr val="2B2B2B"/>
+                </a:solidFill>
+                <a:latin typeface="Calibri"/>
+              </a:rPr>
+              <a:t>Individual, con acompañamiento del Docente</a:t>
+            </a:r>
+          </a:p>
+        </p:txBody>
+      </p:sp>
+      <p:sp>
+        <p:nvSpPr>
+          <p:cNvPr id="5" name="TextBox 4"/>
+          <p:cNvSpPr txBox="1"/>
+          <p:nvPr/>
+        </p:nvSpPr>
+        <p:spPr>
+          <a:xfrm>
+            <a:off x="640080" y="2011679"/>
+            <a:ext cx="10911535" cy="4297680"/>
+          </a:xfrm>
+          <a:prstGeom prst="rect">
+            <a:avLst/>
+          </a:prstGeom>
+          <a:noFill/>
+        </p:spPr>
+        <p:txBody>
+          <a:bodyPr wrap="square" anchor="t" lIns="0" rIns="0" tIns="0" bIns="0">
+            <a:spAutoFit/>
+          </a:bodyPr>
+          <a:lstStyle/>
+          <a:p>
             <a:pPr>
               <a:spcAft>
                 <a:spcPts val="1000"/>
@@ -5760,16 +5815,16 @@
                 </a:solidFill>
                 <a:latin typeface="Calibri"/>
               </a:rPr>
-              <a:t>Tiempo:</a:t>
-            </a:r>
-            <a:r>
-              <a:rPr sz="1600" b="0" i="0">
-                <a:solidFill>
-                  <a:srgbClr val="2B2B2B"/>
-                </a:solidFill>
-                <a:latin typeface="Calibri"/>
-              </a:rPr>
-              <a:t> 20 minutos de trabajo individual, con acompañamiento del Docente.</a:t>
+              <a:t>Al final tiene:</a:t>
+            </a:r>
+            <a:r>
+              <a:rPr sz="1600" b="0" i="0">
+                <a:solidFill>
+                  <a:srgbClr val="2B2B2B"/>
+                </a:solidFill>
+                <a:latin typeface="Calibri"/>
+              </a:rPr>
+              <a:t> enfoque, alcance y diseño justificados, más la matriz pregunta–método.</a:t>
             </a:r>
           </a:p>
           <a:p>
@@ -5794,16 +5849,34 @@
                 </a:solidFill>
                 <a:latin typeface="Calibri"/>
               </a:rPr>
-              <a:t>Archivo:</a:t>
-            </a:r>
-            <a:r>
-              <a:rPr sz="1600" b="0" i="0">
-                <a:solidFill>
-                  <a:srgbClr val="2B2B2B"/>
-                </a:solidFill>
-                <a:latin typeface="Calibri"/>
-              </a:rPr>
-              <a:t> un documento en Google Docs llamado S07_Metodologia_Apellido.</a:t>
+              <a:t>Paso 1</a:t>
+            </a:r>
+            <a:r>
+              <a:rPr sz="1600" b="0" i="0">
+                <a:solidFill>
+                  <a:srgbClr val="2B2B2B"/>
+                </a:solidFill>
+                <a:latin typeface="Calibri"/>
+              </a:rPr>
+              <a:t> · Defina </a:t>
+            </a:r>
+            <a:r>
+              <a:rPr sz="1600" b="1" i="0">
+                <a:solidFill>
+                  <a:srgbClr val="2B2B2B"/>
+                </a:solidFill>
+                <a:latin typeface="Calibri"/>
+              </a:rPr>
+              <a:t>enfoque, alcance y diseño</a:t>
+            </a:r>
+            <a:r>
+              <a:rPr sz="1600" b="0" i="0">
+                <a:solidFill>
+                  <a:srgbClr val="2B2B2B"/>
+                </a:solidFill>
+                <a:latin typeface="Calibri"/>
+              </a:rPr>
+              <a:t>, cada uno con una línea de justificación que empiece con «porque».</a:t>
             </a:r>
           </a:p>
           <a:p>
@@ -5828,16 +5901,16 @@
                 </a:solidFill>
                 <a:latin typeface="Calibri"/>
               </a:rPr>
-              <a:t>Consigna 1.</a:t>
-            </a:r>
-            <a:r>
-              <a:rPr sz="1600" b="0" i="0">
-                <a:solidFill>
-                  <a:srgbClr val="2B2B2B"/>
-                </a:solidFill>
-                <a:latin typeface="Calibri"/>
-              </a:rPr>
-              <a:t> Defina </a:t>
+              <a:t>Paso 2</a:t>
+            </a:r>
+            <a:r>
+              <a:rPr sz="1600" b="0" i="0">
+                <a:solidFill>
+                  <a:srgbClr val="2B2B2B"/>
+                </a:solidFill>
+                <a:latin typeface="Calibri"/>
+              </a:rPr>
+              <a:t> · Arme la </a:t>
             </a:r>
             <a:r>
               <a:rPr sz="1600" b="1" i="0">
@@ -5846,16 +5919,16 @@
                 </a:solidFill>
                 <a:latin typeface="Calibri"/>
               </a:rPr>
-              <a:t>enfoque, alcance y diseño</a:t>
-            </a:r>
-            <a:r>
-              <a:rPr sz="1600" b="0" i="0">
-                <a:solidFill>
-                  <a:srgbClr val="2B2B2B"/>
-                </a:solidFill>
-                <a:latin typeface="Calibri"/>
-              </a:rPr>
-              <a:t>, cada uno con una línea de justificación que empiece con 'porque'.</a:t>
+              <a:t>matriz pregunta–método</a:t>
+            </a:r>
+            <a:r>
+              <a:rPr sz="1600" b="0" i="0">
+                <a:solidFill>
+                  <a:srgbClr val="2B2B2B"/>
+                </a:solidFill>
+                <a:latin typeface="Calibri"/>
+              </a:rPr>
+              <a:t>: una fila por objetivo específico, con dato / técnica / análisis.</a:t>
             </a:r>
           </a:p>
           <a:p>
@@ -5880,16 +5953,16 @@
                 </a:solidFill>
                 <a:latin typeface="Calibri"/>
               </a:rPr>
-              <a:t>Consigna 2.</a:t>
-            </a:r>
-            <a:r>
-              <a:rPr sz="1600" b="0" i="0">
-                <a:solidFill>
-                  <a:srgbClr val="2B2B2B"/>
-                </a:solidFill>
-                <a:latin typeface="Calibri"/>
-              </a:rPr>
-              <a:t> Arme la </a:t>
+              <a:t>Paso 3</a:t>
+            </a:r>
+            <a:r>
+              <a:rPr sz="1600" b="0" i="0">
+                <a:solidFill>
+                  <a:srgbClr val="2B2B2B"/>
+                </a:solidFill>
+                <a:latin typeface="Calibri"/>
+              </a:rPr>
+              <a:t> · Redacte todo </a:t>
             </a:r>
             <a:r>
               <a:rPr sz="1600" b="1" i="0">
@@ -5898,16 +5971,16 @@
                 </a:solidFill>
                 <a:latin typeface="Calibri"/>
               </a:rPr>
-              <a:t>matriz pregunta–método</a:t>
-            </a:r>
-            <a:r>
-              <a:rPr sz="1600" b="0" i="0">
-                <a:solidFill>
-                  <a:srgbClr val="2B2B2B"/>
-                </a:solidFill>
-                <a:latin typeface="Calibri"/>
-              </a:rPr>
-              <a:t>: una fila por objetivo específico, con dato / técnica / análisis.</a:t>
+              <a:t>en propuesto</a:t>
+            </a:r>
+            <a:r>
+              <a:rPr sz="1600" b="0" i="0">
+                <a:solidFill>
+                  <a:srgbClr val="2B2B2B"/>
+                </a:solidFill>
+                <a:latin typeface="Calibri"/>
+              </a:rPr>
+              <a:t>: ni un verbo en pasado referido a datos.</a:t>
             </a:r>
           </a:p>
           <a:p>
@@ -5932,16 +6005,16 @@
                 </a:solidFill>
                 <a:latin typeface="Calibri"/>
               </a:rPr>
-              <a:t>Consigna 3.</a:t>
-            </a:r>
-            <a:r>
-              <a:rPr sz="1600" b="0" i="0">
-                <a:solidFill>
-                  <a:srgbClr val="2B2B2B"/>
-                </a:solidFill>
-                <a:latin typeface="Calibri"/>
-              </a:rPr>
-              <a:t> Redacte todo en </a:t>
+              <a:t>En clase, sin falta:</a:t>
+            </a:r>
+            <a:r>
+              <a:rPr sz="1600" b="0" i="0">
+                <a:solidFill>
+                  <a:srgbClr val="2B2B2B"/>
+                </a:solidFill>
+                <a:latin typeface="Calibri"/>
+              </a:rPr>
+              <a:t> los </a:t>
             </a:r>
             <a:r>
               <a:rPr sz="1600" b="1" i="0">
@@ -5950,109 +6023,23 @@
                 </a:solidFill>
                 <a:latin typeface="Calibri"/>
               </a:rPr>
-              <a:t>propuesto</a:t>
-            </a:r>
-            <a:r>
-              <a:rPr sz="1600" b="0" i="0">
-                <a:solidFill>
-                  <a:srgbClr val="2B2B2B"/>
-                </a:solidFill>
-                <a:latin typeface="Calibri"/>
-              </a:rPr>
-              <a:t>: ni un verbo en pasado referido a datos.</a:t>
-            </a:r>
-          </a:p>
-          <a:p>
-            <a:pPr>
-              <a:spcAft>
-                <a:spcPts val="1000"/>
-              </a:spcAft>
-            </a:pPr>
-            <a:r>
-              <a:rPr sz="1600" b="0" i="0">
-                <a:solidFill>
-                  <a:srgbClr val="2B2B2B"/>
-                </a:solidFill>
-                <a:latin typeface="Calibri"/>
-              </a:rPr>
-              <a:t>–   </a:t>
-            </a:r>
-            <a:r>
-              <a:rPr sz="1600" b="1" i="0">
-                <a:solidFill>
-                  <a:srgbClr val="2B2B2B"/>
-                </a:solidFill>
-                <a:latin typeface="Calibri"/>
-              </a:rPr>
-              <a:t>Criterio de éxito (verificable):</a:t>
-            </a:r>
-            <a:r>
-              <a:rPr sz="1600" b="0" i="0">
-                <a:solidFill>
-                  <a:srgbClr val="2B2B2B"/>
-                </a:solidFill>
-                <a:latin typeface="Calibri"/>
-              </a:rPr>
-              <a:t> todos sus objetivos específicos tienen fila; ninguna técnica queda huérfana; Ctrl+F de 'se aplicó' y 'se obtuvo' devuelve cero resultados.</a:t>
-            </a:r>
-          </a:p>
-          <a:p>
-            <a:pPr>
-              <a:spcAft>
-                <a:spcPts val="1000"/>
-              </a:spcAft>
-            </a:pPr>
-            <a:r>
-              <a:rPr sz="1600" b="0" i="0">
-                <a:solidFill>
-                  <a:srgbClr val="2B2B2B"/>
-                </a:solidFill>
-                <a:latin typeface="Calibri"/>
-              </a:rPr>
-              <a:t>–   </a:t>
-            </a:r>
-            <a:r>
-              <a:rPr sz="1600" b="1" i="0">
-                <a:solidFill>
-                  <a:srgbClr val="2B2B2B"/>
-                </a:solidFill>
-                <a:latin typeface="Calibri"/>
-              </a:rPr>
-              <a:t>Entrega:</a:t>
-            </a:r>
-            <a:r>
-              <a:rPr sz="1600" b="0" i="0">
-                <a:solidFill>
-                  <a:srgbClr val="2B2B2B"/>
-                </a:solidFill>
-                <a:latin typeface="Calibri"/>
-              </a:rPr>
-              <a:t> suba S07_Metodologia_Apellido a </a:t>
-            </a:r>
-            <a:r>
-              <a:rPr sz="1600" b="1" i="0">
-                <a:solidFill>
-                  <a:srgbClr val="2B2B2B"/>
-                </a:solidFill>
-                <a:latin typeface="Calibri"/>
-              </a:rPr>
-              <a:t>CDigital</a:t>
-            </a:r>
-            <a:r>
-              <a:rPr sz="1600" b="0" i="0">
-                <a:solidFill>
-                  <a:srgbClr val="2B2B2B"/>
-                </a:solidFill>
-                <a:latin typeface="Calibri"/>
-              </a:rPr>
-              <a:t> — [URL CDigital — campus del curso pendiente].</a:t>
-            </a:r>
-          </a:p>
-        </p:txBody>
-      </p:sp>
-      <p:sp>
-        <p:nvSpPr>
-          <p:cNvPr id="5" name="TextBox 4"/>
+              <a:t>pasos 1 a 2</a:t>
+            </a:r>
+            <a:r>
+              <a:rPr sz="1600" b="0" i="0">
+                <a:solidFill>
+                  <a:srgbClr val="2B2B2B"/>
+                </a:solidFill>
+                <a:latin typeface="Calibri"/>
+              </a:rPr>
+              <a:t>. Del 3 en adelante puede quedar en trabajo autónomo, pero antes de la próxima sesión.</a:t>
+            </a:r>
+          </a:p>
+        </p:txBody>
+      </p:sp>
+      <p:sp>
+        <p:nvSpPr>
+          <p:cNvPr id="6" name="TextBox 5"/>
           <p:cNvSpPr txBox="1"/>
           <p:nvPr/>
         </p:nvSpPr>
@@ -6185,7 +6172,7 @@
                 </a:solidFill>
                 <a:latin typeface="Calibri"/>
               </a:rPr>
-              <a:t>Checklist de autoevaluación antes de entregar</a:t>
+              <a:t>TALLER · cómo se revisa y dónde se entrega</a:t>
             </a:r>
           </a:p>
         </p:txBody>
@@ -6198,8 +6185,8 @@
         </p:nvSpPr>
         <p:spPr>
           <a:xfrm>
-            <a:off x="640080" y="1691639"/>
-            <a:ext cx="10911535" cy="4617720"/>
+            <a:off x="640080" y="1280160"/>
+            <a:ext cx="10911535" cy="411480"/>
           </a:xfrm>
           <a:prstGeom prst="rect">
             <a:avLst/>
@@ -6212,6 +6199,41 @@
           </a:bodyPr>
           <a:lstStyle/>
           <a:p>
+            <a:pPr algn="ctr"/>
+            <a:r>
+              <a:rPr sz="1500" b="0" i="0">
+                <a:solidFill>
+                  <a:srgbClr val="2B2B2B"/>
+                </a:solidFill>
+                <a:latin typeface="Calibri"/>
+              </a:rPr>
+              <a:t>Ficha metodológica y matriz de coherencia</a:t>
+            </a:r>
+          </a:p>
+        </p:txBody>
+      </p:sp>
+      <p:sp>
+        <p:nvSpPr>
+          <p:cNvPr id="5" name="TextBox 4"/>
+          <p:cNvSpPr txBox="1"/>
+          <p:nvPr/>
+        </p:nvSpPr>
+        <p:spPr>
+          <a:xfrm>
+            <a:off x="640080" y="2011679"/>
+            <a:ext cx="10911535" cy="4297680"/>
+          </a:xfrm>
+          <a:prstGeom prst="rect">
+            <a:avLst/>
+          </a:prstGeom>
+          <a:noFill/>
+        </p:spPr>
+        <p:txBody>
+          <a:bodyPr wrap="square" anchor="t" lIns="0" rIns="0" tIns="0" bIns="0">
+            <a:spAutoFit/>
+          </a:bodyPr>
+          <a:lstStyle/>
+          <a:p>
             <a:pPr>
               <a:spcAft>
                 <a:spcPts val="1000"/>
@@ -6224,7 +6246,118 @@
                 </a:solidFill>
                 <a:latin typeface="Calibri"/>
               </a:rPr>
-              <a:t>–   ¿Mi enfoque se justifica con la forma de mi pregunta y no con mi comodidad?</a:t>
+              <a:t>–   </a:t>
+            </a:r>
+            <a:r>
+              <a:rPr sz="1600" b="1" i="0">
+                <a:solidFill>
+                  <a:srgbClr val="2B2B2B"/>
+                </a:solidFill>
+                <a:latin typeface="Calibri"/>
+              </a:rPr>
+              <a:t>Quedó bien si</a:t>
+            </a:r>
+            <a:r>
+              <a:rPr sz="1600" b="0" i="0">
+                <a:solidFill>
+                  <a:srgbClr val="2B2B2B"/>
+                </a:solidFill>
+                <a:latin typeface="Calibri"/>
+              </a:rPr>
+              <a:t> —compruébelo usted antes de cerrar el documento—:</a:t>
+            </a:r>
+          </a:p>
+          <a:p>
+            <a:pPr lvl="1">
+              <a:spcAft>
+                <a:spcPts val="600"/>
+              </a:spcAft>
+            </a:pPr>
+            <a:r>
+              <a:rPr sz="1500" b="0" i="0">
+                <a:solidFill>
+                  <a:srgbClr val="2B2B2B"/>
+                </a:solidFill>
+                <a:latin typeface="Calibri"/>
+              </a:rPr>
+              <a:t>●   </a:t>
+            </a:r>
+            <a:r>
+              <a:rPr sz="1500" b="1" i="0">
+                <a:solidFill>
+                  <a:srgbClr val="2B2B2B"/>
+                </a:solidFill>
+                <a:latin typeface="Calibri"/>
+              </a:rPr>
+              <a:t>Todos</a:t>
+            </a:r>
+            <a:r>
+              <a:rPr sz="1500" b="0" i="0">
+                <a:solidFill>
+                  <a:srgbClr val="2B2B2B"/>
+                </a:solidFill>
+                <a:latin typeface="Calibri"/>
+              </a:rPr>
+              <a:t> sus objetivos específicos tienen fila.</a:t>
+            </a:r>
+          </a:p>
+          <a:p>
+            <a:pPr lvl="1">
+              <a:spcAft>
+                <a:spcPts val="600"/>
+              </a:spcAft>
+            </a:pPr>
+            <a:r>
+              <a:rPr sz="1500" b="0" i="0">
+                <a:solidFill>
+                  <a:srgbClr val="2B2B2B"/>
+                </a:solidFill>
+                <a:latin typeface="Calibri"/>
+              </a:rPr>
+              <a:t>●   </a:t>
+            </a:r>
+            <a:r>
+              <a:rPr sz="1500" b="1" i="0">
+                <a:solidFill>
+                  <a:srgbClr val="2B2B2B"/>
+                </a:solidFill>
+                <a:latin typeface="Calibri"/>
+              </a:rPr>
+              <a:t>Ninguna técnica queda huérfana.</a:t>
+            </a:r>
+          </a:p>
+          <a:p>
+            <a:pPr lvl="1">
+              <a:spcAft>
+                <a:spcPts val="600"/>
+              </a:spcAft>
+            </a:pPr>
+            <a:r>
+              <a:rPr sz="1500" b="0" i="0">
+                <a:solidFill>
+                  <a:srgbClr val="2B2B2B"/>
+                </a:solidFill>
+                <a:latin typeface="Calibri"/>
+              </a:rPr>
+              <a:t>●   Ctrl+F de «se aplicó» y «se obtuvo» devuelve </a:t>
+            </a:r>
+            <a:r>
+              <a:rPr sz="1500" b="1" i="0">
+                <a:solidFill>
+                  <a:srgbClr val="2B2B2B"/>
+                </a:solidFill>
+                <a:latin typeface="Calibri"/>
+              </a:rPr>
+              <a:t>cero</a:t>
+            </a:r>
+            <a:r>
+              <a:rPr sz="1500" b="0" i="0">
+                <a:solidFill>
+                  <a:srgbClr val="2B2B2B"/>
+                </a:solidFill>
+                <a:latin typeface="Calibri"/>
+              </a:rPr>
+              <a:t> resultados.</a:t>
             </a:r>
           </a:p>
           <a:p>
@@ -6240,7 +6373,25 @@
                 </a:solidFill>
                 <a:latin typeface="Calibri"/>
               </a:rPr>
-              <a:t>–   ¿El alcance que declaro corresponde a lo que realmente hallé en antecedentes?</a:t>
+              <a:t>–   </a:t>
+            </a:r>
+            <a:r>
+              <a:rPr sz="1600" b="1" i="0">
+                <a:solidFill>
+                  <a:srgbClr val="2B2B2B"/>
+                </a:solidFill>
+                <a:latin typeface="Calibri"/>
+              </a:rPr>
+              <a:t>Plan B:</a:t>
+            </a:r>
+            <a:r>
+              <a:rPr sz="1600" b="0" i="0">
+                <a:solidFill>
+                  <a:srgbClr val="2B2B2B"/>
+                </a:solidFill>
+                <a:latin typeface="Calibri"/>
+              </a:rPr>
+              <a:t> Si no sabe qué técnica poner en una fila, mire el verbo del objetivo: describir pide medir, comprender pide preguntar, proponer pide validar.</a:t>
             </a:r>
           </a:p>
           <a:p>
@@ -6256,7 +6407,43 @@
                 </a:solidFill>
                 <a:latin typeface="Calibri"/>
               </a:rPr>
-              <a:t>–   ¿Definí población, muestra propuesta y unidad de análisis, o hablé solo en general?</a:t>
+              <a:t>–   </a:t>
+            </a:r>
+            <a:r>
+              <a:rPr sz="1600" b="1" i="0">
+                <a:solidFill>
+                  <a:srgbClr val="2B2B2B"/>
+                </a:solidFill>
+                <a:latin typeface="Calibri"/>
+              </a:rPr>
+              <a:t>Hoy no se sube nada al aula:</a:t>
+            </a:r>
+            <a:r>
+              <a:rPr sz="1600" b="0" i="0">
+                <a:solidFill>
+                  <a:srgbClr val="2B2B2B"/>
+                </a:solidFill>
+                <a:latin typeface="Calibri"/>
+              </a:rPr>
+              <a:t> guarde `S07_Metodologia_Apellido` (Google Doc o PDF) en su Drive y tráigalo a la próxima sesión. Es un </a:t>
+            </a:r>
+            <a:r>
+              <a:rPr sz="1600" b="1" i="0">
+                <a:solidFill>
+                  <a:srgbClr val="2B2B2B"/>
+                </a:solidFill>
+                <a:latin typeface="Calibri"/>
+              </a:rPr>
+              <a:t>avance formativo</a:t>
+            </a:r>
+            <a:r>
+              <a:rPr sz="1600" b="0" i="0">
+                <a:solidFill>
+                  <a:srgbClr val="2B2B2B"/>
+                </a:solidFill>
+                <a:latin typeface="Calibri"/>
+              </a:rPr>
+              <a:t>, se revisa en clase.</a:t>
             </a:r>
           </a:p>
           <a:p>
@@ -6272,78 +6459,104 @@
                 </a:solidFill>
                 <a:latin typeface="Calibri"/>
               </a:rPr>
-              <a:t>–   ¿Cada objetivo específico aparece como una fila de la matriz?</a:t>
-            </a:r>
-          </a:p>
-          <a:p>
-            <a:pPr>
-              <a:spcAft>
-                <a:spcPts val="1000"/>
-              </a:spcAft>
-            </a:pPr>
-            <a:r>
-              <a:rPr sz="1600" b="0" i="0">
-                <a:solidFill>
-                  <a:srgbClr val="2B2B2B"/>
-                </a:solidFill>
-                <a:latin typeface="Calibri"/>
-              </a:rPr>
-              <a:t>–   ¿Cada técnica de la matriz responde a algún objetivo concreto?</a:t>
-            </a:r>
-          </a:p>
-          <a:p>
-            <a:pPr>
-              <a:spcAft>
-                <a:spcPts val="1000"/>
-              </a:spcAft>
-            </a:pPr>
-            <a:r>
-              <a:rPr sz="1600" b="0" i="0">
-                <a:solidFill>
-                  <a:srgbClr val="2B2B2B"/>
-                </a:solidFill>
-                <a:latin typeface="Calibri"/>
-              </a:rPr>
-              <a:t>–   ¿Todos los verbos sobre datos están en futuro o en 'se propone'?</a:t>
-            </a:r>
-          </a:p>
-          <a:p>
-            <a:pPr>
-              <a:spcAft>
-                <a:spcPts val="1000"/>
-              </a:spcAft>
-            </a:pPr>
-            <a:r>
-              <a:rPr sz="1600" b="0" i="0">
-                <a:solidFill>
-                  <a:srgbClr val="2B2B2B"/>
-                </a:solidFill>
-                <a:latin typeface="Calibri"/>
-              </a:rPr>
-              <a:t>–   ¿Cité al menos un referente metodológico en APA 7, con su referencia completa al final?</a:t>
-            </a:r>
-          </a:p>
-          <a:p>
-            <a:pPr>
-              <a:spcAft>
-                <a:spcPts val="1000"/>
-              </a:spcAft>
-            </a:pPr>
-            <a:r>
-              <a:rPr sz="1600" b="0" i="0">
-                <a:solidFill>
-                  <a:srgbClr val="2B2B2B"/>
-                </a:solidFill>
-                <a:latin typeface="Calibri"/>
-              </a:rPr>
-              <a:t>–   ¿El archivo quedó nombrado S07_Metodologia_Apellido y cargado en CDigital?</a:t>
-            </a:r>
-          </a:p>
-        </p:txBody>
-      </p:sp>
-      <p:sp>
-        <p:nvSpPr>
-          <p:cNvPr id="5" name="TextBox 4"/>
+              <a:t>–   </a:t>
+            </a:r>
+            <a:r>
+              <a:rPr sz="1600" b="1" i="0">
+                <a:solidFill>
+                  <a:srgbClr val="2B2B2B"/>
+                </a:solidFill>
+                <a:latin typeface="Calibri"/>
+              </a:rPr>
+              <a:t>Esto alimenta:</a:t>
+            </a:r>
+            <a:r>
+              <a:rPr sz="1600" b="0" i="0">
+                <a:solidFill>
+                  <a:srgbClr val="2B2B2B"/>
+                </a:solidFill>
+                <a:latin typeface="Calibri"/>
+              </a:rPr>
+              <a:t> </a:t>
+            </a:r>
+            <a:r>
+              <a:rPr sz="1600" b="1" i="0">
+                <a:solidFill>
+                  <a:srgbClr val="2B2B2B"/>
+                </a:solidFill>
+                <a:latin typeface="Calibri"/>
+              </a:rPr>
+              <a:t>ACA Final</a:t>
+            </a:r>
+            <a:r>
+              <a:rPr sz="1600" b="0" i="0">
+                <a:solidFill>
+                  <a:srgbClr val="2B2B2B"/>
+                </a:solidFill>
+                <a:latin typeface="Calibri"/>
+              </a:rPr>
+              <a:t> —tarea, 32,8%—, el documento que </a:t>
+            </a:r>
+            <a:r>
+              <a:rPr sz="1600" b="1" i="0">
+                <a:solidFill>
+                  <a:srgbClr val="2B2B2B"/>
+                </a:solidFill>
+                <a:latin typeface="Calibri"/>
+              </a:rPr>
+              <a:t>sí</a:t>
+            </a:r>
+            <a:r>
+              <a:rPr sz="1600" b="0" i="0">
+                <a:solidFill>
+                  <a:srgbClr val="2B2B2B"/>
+                </a:solidFill>
+                <a:latin typeface="Calibri"/>
+              </a:rPr>
+              <a:t> recibe </a:t>
+            </a:r>
+            <a:r>
+              <a:rPr sz="1600" b="1" i="0">
+                <a:solidFill>
+                  <a:srgbClr val="2B2B2B"/>
+                </a:solidFill>
+                <a:latin typeface="Calibri"/>
+              </a:rPr>
+              <a:t>CDigital</a:t>
+            </a:r>
+            <a:r>
+              <a:rPr sz="1600" b="0" i="0">
+                <a:solidFill>
+                  <a:srgbClr val="2B2B2B"/>
+                </a:solidFill>
+                <a:latin typeface="Calibri"/>
+              </a:rPr>
+              <a:t>; cierra en la semana de la </a:t>
+            </a:r>
+            <a:r>
+              <a:rPr sz="1600" b="1" i="0">
+                <a:solidFill>
+                  <a:srgbClr val="2B2B2B"/>
+                </a:solidFill>
+                <a:latin typeface="Calibri"/>
+              </a:rPr>
+              <a:t>Sesión 11</a:t>
+            </a:r>
+            <a:r>
+              <a:rPr sz="1600" b="0" i="0">
+                <a:solidFill>
+                  <a:srgbClr val="2B2B2B"/>
+                </a:solidFill>
+                <a:latin typeface="Calibri"/>
+              </a:rPr>
+              <a:t>.</a:t>
+            </a:r>
+          </a:p>
+        </p:txBody>
+      </p:sp>
+      <p:sp>
+        <p:nvSpPr>
+          <p:cNvPr id="6" name="TextBox 5"/>
           <p:cNvSpPr txBox="1"/>
           <p:nvPr/>
         </p:nvSpPr>
@@ -6476,7 +6689,7 @@
                 </a:solidFill>
                 <a:latin typeface="Calibri"/>
               </a:rPr>
-              <a:t>Para continuar (trabajo autónomo)</a:t>
+              <a:t>Checklist de autoevaluación antes de entregar</a:t>
             </a:r>
           </a:p>
         </p:txBody>
@@ -6515,7 +6728,7 @@
                 </a:solidFill>
                 <a:latin typeface="Calibri"/>
               </a:rPr>
-              <a:t>–   Termine y suba S07_Metodologia_Apellido con la ficha y la matriz completas.</a:t>
+              <a:t>–   ¿Mi enfoque se justifica con la forma de mi pregunta y no con mi comodidad?</a:t>
             </a:r>
           </a:p>
           <a:p>
@@ -6531,25 +6744,7 @@
                 </a:solidFill>
                 <a:latin typeface="Calibri"/>
               </a:rPr>
-              <a:t>–   Verifique que la matriz no contradiga sus objetivos ya escritos: si chocan, ajuste </a:t>
-            </a:r>
-            <a:r>
-              <a:rPr sz="1600" b="1" i="0">
-                <a:solidFill>
-                  <a:srgbClr val="2B2B2B"/>
-                </a:solidFill>
-                <a:latin typeface="Calibri"/>
-              </a:rPr>
-              <a:t>los dos</a:t>
-            </a:r>
-            <a:r>
-              <a:rPr sz="1600" b="0" i="0">
-                <a:solidFill>
-                  <a:srgbClr val="2B2B2B"/>
-                </a:solidFill>
-                <a:latin typeface="Calibri"/>
-              </a:rPr>
-              <a:t>, no solo uno.</a:t>
+              <a:t>–   ¿El alcance que declaro corresponde a lo que realmente hallé en antecedentes?</a:t>
             </a:r>
           </a:p>
           <a:p>
@@ -6565,7 +6760,7 @@
                 </a:solidFill>
                 <a:latin typeface="Calibri"/>
               </a:rPr>
-              <a:t>–   Lea la metodología de un artículo de su área y subraye cómo justifican cada decisión: esa forma de argumentar es la que se imita.</a:t>
+              <a:t>–   ¿Definí población, muestra propuesta y unidad de análisis, o hablé solo en general?</a:t>
             </a:r>
           </a:p>
           <a:p>
@@ -6581,7 +6776,7 @@
                 </a:solidFill>
                 <a:latin typeface="Calibri"/>
               </a:rPr>
-              <a:t>–   Deje anotado en el documento aquello que todavía no sabe cómo medir: será materia prima de la próxima sesión.</a:t>
+              <a:t>–   ¿Cada objetivo específico aparece como una fila de la matriz?</a:t>
             </a:r>
           </a:p>
           <a:p>
@@ -6597,59 +6792,55 @@
                 </a:solidFill>
                 <a:latin typeface="Calibri"/>
               </a:rPr>
-              <a:t>–   </a:t>
-            </a:r>
-            <a:r>
-              <a:rPr sz="1600" b="1" i="0">
-                <a:solidFill>
-                  <a:srgbClr val="2B2B2B"/>
-                </a:solidFill>
-                <a:latin typeface="Calibri"/>
-              </a:rPr>
-              <a:t>Próxima sesión:</a:t>
-            </a:r>
-            <a:r>
-              <a:rPr sz="1600" b="0" i="0">
-                <a:solidFill>
-                  <a:srgbClr val="2B2B2B"/>
-                </a:solidFill>
-                <a:latin typeface="Calibri"/>
-              </a:rPr>
-              <a:t> bajamos la metodología a lo concreto — </a:t>
-            </a:r>
-            <a:r>
-              <a:rPr sz="1600" b="1" i="0">
-                <a:solidFill>
-                  <a:srgbClr val="2B2B2B"/>
-                </a:solidFill>
-                <a:latin typeface="Calibri"/>
-              </a:rPr>
-              <a:t>instrumentos y plan de análisis propuestos</a:t>
-            </a:r>
-            <a:r>
-              <a:rPr sz="1600" b="0" i="0">
-                <a:solidFill>
-                  <a:srgbClr val="2B2B2B"/>
-                </a:solidFill>
-                <a:latin typeface="Calibri"/>
-              </a:rPr>
-              <a:t>.</a:t>
-            </a:r>
-          </a:p>
-          <a:p>
-            <a:pPr lvl="1">
+              <a:t>–   ¿Cada técnica de la matriz responde a algún objetivo concreto?</a:t>
+            </a:r>
+          </a:p>
+          <a:p>
+            <a:pPr>
               <a:spcAft>
-                <a:spcPts val="600"/>
+                <a:spcPts val="1000"/>
               </a:spcAft>
             </a:pPr>
             <a:r>
-              <a:rPr sz="1500" b="0" i="0">
-                <a:solidFill>
-                  <a:srgbClr val="2B2B2B"/>
-                </a:solidFill>
-                <a:latin typeface="Calibri"/>
-              </a:rPr>
-              <a:t>●   Traiga la matriz abierta: cada celda de 'dato que necesito' se convertirá en ítems del instrumento.</a:t>
+              <a:rPr sz="1600" b="0" i="0">
+                <a:solidFill>
+                  <a:srgbClr val="2B2B2B"/>
+                </a:solidFill>
+                <a:latin typeface="Calibri"/>
+              </a:rPr>
+              <a:t>–   ¿Todos los verbos sobre datos están en futuro o en 'se propone'?</a:t>
+            </a:r>
+          </a:p>
+          <a:p>
+            <a:pPr>
+              <a:spcAft>
+                <a:spcPts val="1000"/>
+              </a:spcAft>
+            </a:pPr>
+            <a:r>
+              <a:rPr sz="1600" b="0" i="0">
+                <a:solidFill>
+                  <a:srgbClr val="2B2B2B"/>
+                </a:solidFill>
+                <a:latin typeface="Calibri"/>
+              </a:rPr>
+              <a:t>–   ¿Cité al menos un referente metodológico en APA 7, con su referencia completa al final?</a:t>
+            </a:r>
+          </a:p>
+          <a:p>
+            <a:pPr>
+              <a:spcAft>
+                <a:spcPts val="1000"/>
+              </a:spcAft>
+            </a:pPr>
+            <a:r>
+              <a:rPr sz="1600" b="0" i="0">
+                <a:solidFill>
+                  <a:srgbClr val="2B2B2B"/>
+                </a:solidFill>
+                <a:latin typeface="Calibri"/>
+              </a:rPr>
+              <a:t>–   ¿El archivo quedó nombrado S07_Metodologia_Apellido y cargado en CDigital?</a:t>
             </a:r>
           </a:p>
         </p:txBody>
@@ -6698,6 +6889,1917 @@
 </file>
 
 <file path=ppt/slides/slide18.xml><?xml version="1.0" encoding="utf-8"?>
+<p:sld xmlns:a="http://schemas.openxmlformats.org/drawingml/2006/main" xmlns:p="http://schemas.openxmlformats.org/presentationml/2006/main" xmlns:r="http://schemas.openxmlformats.org/officeDocument/2006/relationships">
+  <p:cSld>
+    <p:bg>
+      <p:bgPr>
+        <a:solidFill>
+          <a:srgbClr val="FFFFFF"/>
+        </a:solidFill>
+        <a:effectLst/>
+      </p:bgPr>
+    </p:bg>
+    <p:spTree>
+      <p:nvGrpSpPr>
+        <p:cNvPr id="1" name=""/>
+        <p:cNvGrpSpPr/>
+        <p:nvPr/>
+      </p:nvGrpSpPr>
+      <p:grpSpPr/>
+      <p:sp>
+        <p:nvSpPr>
+          <p:cNvPr id="2" name="Rectangle 1"/>
+          <p:cNvSpPr/>
+          <p:nvPr/>
+        </p:nvSpPr>
+        <p:spPr>
+          <a:xfrm>
+            <a:off x="0" y="0"/>
+            <a:ext cx="12191695" cy="1188720"/>
+          </a:xfrm>
+          <a:prstGeom prst="rect">
+            <a:avLst/>
+          </a:prstGeom>
+          <a:solidFill>
+            <a:srgbClr val="0C2340"/>
+          </a:solidFill>
+          <a:ln>
+            <a:noFill/>
+          </a:ln>
+          <a:effectLst/>
+        </p:spPr>
+        <p:style>
+          <a:lnRef idx="1">
+            <a:schemeClr val="accent1"/>
+          </a:lnRef>
+          <a:fillRef idx="3">
+            <a:schemeClr val="accent1"/>
+          </a:fillRef>
+          <a:effectRef idx="2">
+            <a:schemeClr val="accent1"/>
+          </a:effectRef>
+          <a:fontRef idx="minor">
+            <a:schemeClr val="lt1"/>
+          </a:fontRef>
+        </p:style>
+        <p:txBody>
+          <a:bodyPr rtlCol="0" anchor="ctr"/>
+          <a:lstStyle/>
+          <a:p>
+            <a:pPr algn="ctr"/>
+          </a:p>
+        </p:txBody>
+      </p:sp>
+      <p:sp>
+        <p:nvSpPr>
+          <p:cNvPr id="3" name="TextBox 2"/>
+          <p:cNvSpPr txBox="1"/>
+          <p:nvPr/>
+        </p:nvSpPr>
+        <p:spPr>
+          <a:xfrm>
+            <a:off x="640080" y="0"/>
+            <a:ext cx="9082735" cy="1188720"/>
+          </a:xfrm>
+          <a:prstGeom prst="rect">
+            <a:avLst/>
+          </a:prstGeom>
+          <a:noFill/>
+        </p:spPr>
+        <p:txBody>
+          <a:bodyPr wrap="square" anchor="ctr" lIns="0" rIns="0" tIns="0" bIns="0">
+            <a:spAutoFit/>
+          </a:bodyPr>
+          <a:lstStyle/>
+          <a:p>
+            <a:pPr algn="ctr"/>
+            <a:r>
+              <a:rPr sz="2600" b="1" i="0">
+                <a:solidFill>
+                  <a:srgbClr val="FFFFFF"/>
+                </a:solidFill>
+                <a:latin typeface="Calibri"/>
+              </a:rPr>
+              <a:t>Para continuar (trabajo autónomo)</a:t>
+            </a:r>
+          </a:p>
+        </p:txBody>
+      </p:sp>
+      <p:sp>
+        <p:nvSpPr>
+          <p:cNvPr id="4" name="TextBox 3"/>
+          <p:cNvSpPr txBox="1"/>
+          <p:nvPr/>
+        </p:nvSpPr>
+        <p:spPr>
+          <a:xfrm>
+            <a:off x="640080" y="1691639"/>
+            <a:ext cx="10911535" cy="4617720"/>
+          </a:xfrm>
+          <a:prstGeom prst="rect">
+            <a:avLst/>
+          </a:prstGeom>
+          <a:noFill/>
+        </p:spPr>
+        <p:txBody>
+          <a:bodyPr wrap="square" anchor="t" lIns="0" rIns="0" tIns="0" bIns="0">
+            <a:spAutoFit/>
+          </a:bodyPr>
+          <a:lstStyle/>
+          <a:p>
+            <a:pPr>
+              <a:spcAft>
+                <a:spcPts val="1000"/>
+              </a:spcAft>
+            </a:pPr>
+            <a:r>
+              <a:rPr sz="1600" b="0" i="0">
+                <a:solidFill>
+                  <a:srgbClr val="2B2B2B"/>
+                </a:solidFill>
+                <a:latin typeface="Calibri"/>
+              </a:rPr>
+              <a:t>–   Termine y suba S07_Metodologia_Apellido con la ficha y la matriz completas.</a:t>
+            </a:r>
+          </a:p>
+          <a:p>
+            <a:pPr>
+              <a:spcAft>
+                <a:spcPts val="1000"/>
+              </a:spcAft>
+            </a:pPr>
+            <a:r>
+              <a:rPr sz="1600" b="0" i="0">
+                <a:solidFill>
+                  <a:srgbClr val="2B2B2B"/>
+                </a:solidFill>
+                <a:latin typeface="Calibri"/>
+              </a:rPr>
+              <a:t>–   Verifique que la matriz no contradiga sus objetivos ya escritos: si chocan, ajuste </a:t>
+            </a:r>
+            <a:r>
+              <a:rPr sz="1600" b="1" i="0">
+                <a:solidFill>
+                  <a:srgbClr val="2B2B2B"/>
+                </a:solidFill>
+                <a:latin typeface="Calibri"/>
+              </a:rPr>
+              <a:t>los dos</a:t>
+            </a:r>
+            <a:r>
+              <a:rPr sz="1600" b="0" i="0">
+                <a:solidFill>
+                  <a:srgbClr val="2B2B2B"/>
+                </a:solidFill>
+                <a:latin typeface="Calibri"/>
+              </a:rPr>
+              <a:t>, no solo uno.</a:t>
+            </a:r>
+          </a:p>
+          <a:p>
+            <a:pPr>
+              <a:spcAft>
+                <a:spcPts val="1000"/>
+              </a:spcAft>
+            </a:pPr>
+            <a:r>
+              <a:rPr sz="1600" b="0" i="0">
+                <a:solidFill>
+                  <a:srgbClr val="2B2B2B"/>
+                </a:solidFill>
+                <a:latin typeface="Calibri"/>
+              </a:rPr>
+              <a:t>–   Lea la metodología de un artículo de su área y subraye cómo justifican cada decisión: esa forma de argumentar es la que se imita.</a:t>
+            </a:r>
+          </a:p>
+          <a:p>
+            <a:pPr>
+              <a:spcAft>
+                <a:spcPts val="1000"/>
+              </a:spcAft>
+            </a:pPr>
+            <a:r>
+              <a:rPr sz="1600" b="0" i="0">
+                <a:solidFill>
+                  <a:srgbClr val="2B2B2B"/>
+                </a:solidFill>
+                <a:latin typeface="Calibri"/>
+              </a:rPr>
+              <a:t>–   Deje anotado en el documento aquello que todavía no sabe cómo medir: será materia prima de la próxima sesión.</a:t>
+            </a:r>
+          </a:p>
+          <a:p>
+            <a:pPr>
+              <a:spcAft>
+                <a:spcPts val="1000"/>
+              </a:spcAft>
+            </a:pPr>
+            <a:r>
+              <a:rPr sz="1600" b="0" i="0">
+                <a:solidFill>
+                  <a:srgbClr val="2B2B2B"/>
+                </a:solidFill>
+                <a:latin typeface="Calibri"/>
+              </a:rPr>
+              <a:t>–   </a:t>
+            </a:r>
+            <a:r>
+              <a:rPr sz="1600" b="1" i="0">
+                <a:solidFill>
+                  <a:srgbClr val="2B2B2B"/>
+                </a:solidFill>
+                <a:latin typeface="Calibri"/>
+              </a:rPr>
+              <a:t>Próxima sesión:</a:t>
+            </a:r>
+            <a:r>
+              <a:rPr sz="1600" b="0" i="0">
+                <a:solidFill>
+                  <a:srgbClr val="2B2B2B"/>
+                </a:solidFill>
+                <a:latin typeface="Calibri"/>
+              </a:rPr>
+              <a:t> bajamos la metodología a lo concreto — </a:t>
+            </a:r>
+            <a:r>
+              <a:rPr sz="1600" b="1" i="0">
+                <a:solidFill>
+                  <a:srgbClr val="2B2B2B"/>
+                </a:solidFill>
+                <a:latin typeface="Calibri"/>
+              </a:rPr>
+              <a:t>instrumentos y plan de análisis propuestos</a:t>
+            </a:r>
+            <a:r>
+              <a:rPr sz="1600" b="0" i="0">
+                <a:solidFill>
+                  <a:srgbClr val="2B2B2B"/>
+                </a:solidFill>
+                <a:latin typeface="Calibri"/>
+              </a:rPr>
+              <a:t>.</a:t>
+            </a:r>
+          </a:p>
+          <a:p>
+            <a:pPr lvl="1">
+              <a:spcAft>
+                <a:spcPts val="600"/>
+              </a:spcAft>
+            </a:pPr>
+            <a:r>
+              <a:rPr sz="1500" b="0" i="0">
+                <a:solidFill>
+                  <a:srgbClr val="2B2B2B"/>
+                </a:solidFill>
+                <a:latin typeface="Calibri"/>
+              </a:rPr>
+              <a:t>●   Traiga la matriz abierta: cada celda de 'dato que necesito' se convertirá en ítems del instrumento.</a:t>
+            </a:r>
+          </a:p>
+        </p:txBody>
+      </p:sp>
+      <p:sp>
+        <p:nvSpPr>
+          <p:cNvPr id="5" name="TextBox 4"/>
+          <p:cNvSpPr txBox="1"/>
+          <p:nvPr/>
+        </p:nvSpPr>
+        <p:spPr>
+          <a:xfrm>
+            <a:off x="11094415" y="6446520"/>
+            <a:ext cx="548640" cy="274320"/>
+          </a:xfrm>
+          <a:prstGeom prst="rect">
+            <a:avLst/>
+          </a:prstGeom>
+          <a:noFill/>
+        </p:spPr>
+        <p:txBody>
+          <a:bodyPr wrap="square" anchor="t" lIns="0" rIns="0" tIns="0" bIns="0">
+            <a:spAutoFit/>
+          </a:bodyPr>
+          <a:lstStyle/>
+          <a:p>
+            <a:pPr algn="r"/>
+            <a:r>
+              <a:rPr sz="1000" b="1" i="0">
+                <a:solidFill>
+                  <a:srgbClr val="8F989D"/>
+                </a:solidFill>
+                <a:latin typeface="Calibri"/>
+              </a:rPr>
+              <a:t>18</a:t>
+            </a:r>
+          </a:p>
+        </p:txBody>
+      </p:sp>
+    </p:spTree>
+  </p:cSld>
+  <p:clrMapOvr>
+    <a:masterClrMapping/>
+  </p:clrMapOvr>
+</p:sld>
+</file>
+
+<file path=ppt/slides/slide19.xml><?xml version="1.0" encoding="utf-8"?>
+<p:sld xmlns:a="http://schemas.openxmlformats.org/drawingml/2006/main" xmlns:p="http://schemas.openxmlformats.org/presentationml/2006/main" xmlns:r="http://schemas.openxmlformats.org/officeDocument/2006/relationships">
+  <p:cSld>
+    <p:bg>
+      <p:bgPr>
+        <a:solidFill>
+          <a:srgbClr val="FFFFFF"/>
+        </a:solidFill>
+        <a:effectLst/>
+      </p:bgPr>
+    </p:bg>
+    <p:spTree>
+      <p:nvGrpSpPr>
+        <p:cNvPr id="1" name=""/>
+        <p:cNvGrpSpPr/>
+        <p:nvPr/>
+      </p:nvGrpSpPr>
+      <p:grpSpPr/>
+      <p:sp>
+        <p:nvSpPr>
+          <p:cNvPr id="2" name="Rectangle 1"/>
+          <p:cNvSpPr/>
+          <p:nvPr/>
+        </p:nvSpPr>
+        <p:spPr>
+          <a:xfrm>
+            <a:off x="0" y="0"/>
+            <a:ext cx="12191695" cy="1188720"/>
+          </a:xfrm>
+          <a:prstGeom prst="rect">
+            <a:avLst/>
+          </a:prstGeom>
+          <a:solidFill>
+            <a:srgbClr val="0C2340"/>
+          </a:solidFill>
+          <a:ln>
+            <a:noFill/>
+          </a:ln>
+          <a:effectLst/>
+        </p:spPr>
+        <p:style>
+          <a:lnRef idx="1">
+            <a:schemeClr val="accent1"/>
+          </a:lnRef>
+          <a:fillRef idx="3">
+            <a:schemeClr val="accent1"/>
+          </a:fillRef>
+          <a:effectRef idx="2">
+            <a:schemeClr val="accent1"/>
+          </a:effectRef>
+          <a:fontRef idx="minor">
+            <a:schemeClr val="lt1"/>
+          </a:fontRef>
+        </p:style>
+        <p:txBody>
+          <a:bodyPr rtlCol="0" anchor="ctr"/>
+          <a:lstStyle/>
+          <a:p>
+            <a:pPr algn="ctr"/>
+          </a:p>
+        </p:txBody>
+      </p:sp>
+      <p:sp>
+        <p:nvSpPr>
+          <p:cNvPr id="3" name="TextBox 2"/>
+          <p:cNvSpPr txBox="1"/>
+          <p:nvPr/>
+        </p:nvSpPr>
+        <p:spPr>
+          <a:xfrm>
+            <a:off x="640080" y="0"/>
+            <a:ext cx="9082735" cy="1188720"/>
+          </a:xfrm>
+          <a:prstGeom prst="rect">
+            <a:avLst/>
+          </a:prstGeom>
+          <a:noFill/>
+        </p:spPr>
+        <p:txBody>
+          <a:bodyPr wrap="square" anchor="ctr" lIns="0" rIns="0" tIns="0" bIns="0">
+            <a:spAutoFit/>
+          </a:bodyPr>
+          <a:lstStyle/>
+          <a:p>
+            <a:pPr algn="ctr"/>
+            <a:r>
+              <a:rPr sz="2600" b="1" i="0">
+                <a:solidFill>
+                  <a:srgbClr val="FFFFFF"/>
+                </a:solidFill>
+                <a:latin typeface="Calibri"/>
+              </a:rPr>
+              <a:t>RUTA DE ENTREGABLES DEL CURSO</a:t>
+            </a:r>
+          </a:p>
+        </p:txBody>
+      </p:sp>
+      <p:sp>
+        <p:nvSpPr>
+          <p:cNvPr id="4" name="TextBox 3"/>
+          <p:cNvSpPr txBox="1"/>
+          <p:nvPr/>
+        </p:nvSpPr>
+        <p:spPr>
+          <a:xfrm>
+            <a:off x="640080" y="1280160"/>
+            <a:ext cx="10911535" cy="411480"/>
+          </a:xfrm>
+          <a:prstGeom prst="rect">
+            <a:avLst/>
+          </a:prstGeom>
+          <a:noFill/>
+        </p:spPr>
+        <p:txBody>
+          <a:bodyPr wrap="square" anchor="t" lIns="0" rIns="0" tIns="0" bIns="0">
+            <a:spAutoFit/>
+          </a:bodyPr>
+          <a:lstStyle/>
+          <a:p>
+            <a:pPr algn="ctr"/>
+            <a:r>
+              <a:rPr sz="1500" b="0" i="0">
+                <a:solidFill>
+                  <a:srgbClr val="2B2B2B"/>
+                </a:solidFill>
+                <a:latin typeface="Calibri"/>
+              </a:rPr>
+              <a:t>Sin fechas a propósito: aquí va </a:t>
+            </a:r>
+            <a:r>
+              <a:rPr sz="1500" b="1" i="0">
+                <a:solidFill>
+                  <a:srgbClr val="2B2B2B"/>
+                </a:solidFill>
+                <a:latin typeface="Calibri"/>
+              </a:rPr>
+              <a:t>en qué punto del curso</a:t>
+            </a:r>
+            <a:r>
+              <a:rPr sz="1500" b="0" i="0">
+                <a:solidFill>
+                  <a:srgbClr val="2B2B2B"/>
+                </a:solidFill>
+                <a:latin typeface="Calibri"/>
+              </a:rPr>
+              <a:t> cierra cada ítem · la ventana exacta la fija CDigital</a:t>
+            </a:r>
+          </a:p>
+        </p:txBody>
+      </p:sp>
+      <p:graphicFrame>
+        <p:nvGraphicFramePr>
+          <p:cNvPr id="5" name="Table 4"/>
+          <p:cNvGraphicFramePr>
+            <a:graphicFrameLocks noGrp="1"/>
+          </p:cNvGraphicFramePr>
+          <p:nvPr/>
+        </p:nvGraphicFramePr>
+        <p:xfrm>
+          <a:off x="640080" y="2011679"/>
+          <a:ext cx="10911533" cy="4297680"/>
+        </p:xfrm>
+        <a:graphic>
+          <a:graphicData uri="http://schemas.openxmlformats.org/drawingml/2006/table">
+            <a:tbl>
+              <a:tblPr>
+                <a:tableStyleId>{2D5ABB26-0587-4C30-8999-92F81FD0307C}</a:tableStyleId>
+              </a:tblPr>
+              <a:tblGrid>
+                <a:gridCol w="2659113"/>
+                <a:gridCol w="2659113"/>
+                <a:gridCol w="5593307"/>
+              </a:tblGrid>
+              <a:tr h="477520">
+                <a:tc>
+                  <a:txBody>
+                    <a:bodyPr/>
+                    <a:lstStyle/>
+                    <a:p>
+                      <a:pPr algn="l"/>
+                      <a:r>
+                        <a:rPr sz="1300" b="1" i="0">
+                          <a:solidFill>
+                            <a:srgbClr val="FFFFFF"/>
+                          </a:solidFill>
+                          <a:latin typeface="Calibri"/>
+                        </a:rPr>
+                        <a:t>Cierra en la semana de…</a:t>
+                      </a:r>
+                    </a:p>
+                  </a:txBody>
+                  <a:tcPr anchor="ctr" marL="109728" marR="91440" marT="36576" marB="36576">
+                    <a:solidFill>
+                      <a:srgbClr val="0C2340"/>
+                    </a:solidFill>
+                  </a:tcPr>
+                </a:tc>
+                <a:tc>
+                  <a:txBody>
+                    <a:bodyPr/>
+                    <a:lstStyle/>
+                    <a:p>
+                      <a:pPr algn="l"/>
+                      <a:r>
+                        <a:rPr sz="1300" b="1" i="0">
+                          <a:solidFill>
+                            <a:srgbClr val="FFFFFF"/>
+                          </a:solidFill>
+                          <a:latin typeface="Calibri"/>
+                        </a:rPr>
+                        <a:t>Entregable</a:t>
+                      </a:r>
+                    </a:p>
+                  </a:txBody>
+                  <a:tcPr anchor="ctr" marL="109728" marR="91440" marT="36576" marB="36576">
+                    <a:solidFill>
+                      <a:srgbClr val="0C2340"/>
+                    </a:solidFill>
+                  </a:tcPr>
+                </a:tc>
+                <a:tc>
+                  <a:txBody>
+                    <a:bodyPr/>
+                    <a:lstStyle/>
+                    <a:p>
+                      <a:pPr algn="l"/>
+                      <a:r>
+                        <a:rPr sz="1300" b="1" i="0">
+                          <a:solidFill>
+                            <a:srgbClr val="FFFFFF"/>
+                          </a:solidFill>
+                          <a:latin typeface="Calibri"/>
+                        </a:rPr>
+                        <a:t>Qué debes tener listo</a:t>
+                      </a:r>
+                    </a:p>
+                  </a:txBody>
+                  <a:tcPr anchor="ctr" marL="109728" marR="91440" marT="36576" marB="36576">
+                    <a:solidFill>
+                      <a:srgbClr val="0C2340"/>
+                    </a:solidFill>
+                  </a:tcPr>
+                </a:tc>
+              </a:tr>
+              <a:tr h="477520">
+                <a:tc>
+                  <a:txBody>
+                    <a:bodyPr/>
+                    <a:lstStyle/>
+                    <a:p>
+                      <a:pPr algn="l"/>
+                      <a:r>
+                        <a:rPr sz="1100" b="1" i="0">
+                          <a:solidFill>
+                            <a:srgbClr val="2B2B2B"/>
+                          </a:solidFill>
+                          <a:latin typeface="Calibri"/>
+                        </a:rPr>
+                        <a:t>Sesión 03</a:t>
+                      </a:r>
+                      <a:r>
+                        <a:rPr sz="1100" b="0" i="0">
+                          <a:solidFill>
+                            <a:srgbClr val="2B2B2B"/>
+                          </a:solidFill>
+                          <a:latin typeface="Calibri"/>
+                        </a:rPr>
+                        <a:t> · ya cerró</a:t>
+                      </a:r>
+                    </a:p>
+                  </a:txBody>
+                  <a:tcPr anchor="ctr" marL="109728" marR="91440" marT="36576" marB="36576">
+                    <a:solidFill>
+                      <a:srgbClr val="FFFFFF"/>
+                    </a:solidFill>
+                  </a:tcPr>
+                </a:tc>
+                <a:tc>
+                  <a:txBody>
+                    <a:bodyPr/>
+                    <a:lstStyle/>
+                    <a:p>
+                      <a:pPr algn="l"/>
+                      <a:r>
+                        <a:rPr sz="1100" b="1" i="0">
+                          <a:solidFill>
+                            <a:srgbClr val="2B2B2B"/>
+                          </a:solidFill>
+                          <a:latin typeface="Calibri"/>
+                        </a:rPr>
+                        <a:t>Quiz 1</a:t>
+                      </a:r>
+                      <a:r>
+                        <a:rPr sz="1100" b="0" i="0">
+                          <a:solidFill>
+                            <a:srgbClr val="2B2B2B"/>
+                          </a:solidFill>
+                          <a:latin typeface="Calibri"/>
+                        </a:rPr>
+                        <a:t> · Cuestionario · 6%</a:t>
+                      </a:r>
+                    </a:p>
+                  </a:txBody>
+                  <a:tcPr anchor="ctr" marL="109728" marR="91440" marT="36576" marB="36576">
+                    <a:solidFill>
+                      <a:srgbClr val="FFFFFF"/>
+                    </a:solidFill>
+                  </a:tcPr>
+                </a:tc>
+                <a:tc>
+                  <a:txBody>
+                    <a:bodyPr/>
+                    <a:lstStyle/>
+                    <a:p>
+                      <a:pPr algn="l"/>
+                      <a:r>
+                        <a:rPr sz="1100" b="0" i="0">
+                          <a:solidFill>
+                            <a:srgbClr val="2B2B2B"/>
+                          </a:solidFill>
+                          <a:latin typeface="Calibri"/>
+                        </a:rPr>
+                        <a:t>Ten formulados </a:t>
+                      </a:r>
+                      <a:r>
+                        <a:rPr sz="1100" b="1" i="0">
+                          <a:solidFill>
+                            <a:srgbClr val="2B2B2B"/>
+                          </a:solidFill>
+                          <a:latin typeface="Calibri"/>
+                        </a:rPr>
+                        <a:t>pregunta, objetivos y título</a:t>
+                      </a:r>
+                      <a:r>
+                        <a:rPr sz="1100" b="0" i="0">
+                          <a:solidFill>
+                            <a:srgbClr val="2B2B2B"/>
+                          </a:solidFill>
+                          <a:latin typeface="Calibri"/>
+                        </a:rPr>
+                        <a:t> provisional.</a:t>
+                      </a:r>
+                    </a:p>
+                  </a:txBody>
+                  <a:tcPr anchor="ctr" marL="109728" marR="91440" marT="36576" marB="36576">
+                    <a:solidFill>
+                      <a:srgbClr val="FFFFFF"/>
+                    </a:solidFill>
+                  </a:tcPr>
+                </a:tc>
+              </a:tr>
+              <a:tr h="477520">
+                <a:tc>
+                  <a:txBody>
+                    <a:bodyPr/>
+                    <a:lstStyle/>
+                    <a:p>
+                      <a:pPr algn="l"/>
+                      <a:r>
+                        <a:rPr sz="1100" b="1" i="0">
+                          <a:solidFill>
+                            <a:srgbClr val="2B2B2B"/>
+                          </a:solidFill>
+                          <a:latin typeface="Calibri"/>
+                        </a:rPr>
+                        <a:t>Sesión 05</a:t>
+                      </a:r>
+                      <a:r>
+                        <a:rPr sz="1100" b="0" i="0">
+                          <a:solidFill>
+                            <a:srgbClr val="2B2B2B"/>
+                          </a:solidFill>
+                          <a:latin typeface="Calibri"/>
+                        </a:rPr>
+                        <a:t> · ya cerró</a:t>
+                      </a:r>
+                    </a:p>
+                  </a:txBody>
+                  <a:tcPr anchor="ctr" marL="109728" marR="91440" marT="36576" marB="36576">
+                    <a:solidFill>
+                      <a:srgbClr val="F2F2F2"/>
+                    </a:solidFill>
+                  </a:tcPr>
+                </a:tc>
+                <a:tc>
+                  <a:txBody>
+                    <a:bodyPr/>
+                    <a:lstStyle/>
+                    <a:p>
+                      <a:pPr algn="l"/>
+                      <a:r>
+                        <a:rPr sz="1100" b="1" i="0">
+                          <a:solidFill>
+                            <a:srgbClr val="2B2B2B"/>
+                          </a:solidFill>
+                          <a:latin typeface="Calibri"/>
+                        </a:rPr>
+                        <a:t>Parcial 1</a:t>
+                      </a:r>
+                      <a:r>
+                        <a:rPr sz="1100" b="0" i="0">
+                          <a:solidFill>
+                            <a:srgbClr val="2B2B2B"/>
+                          </a:solidFill>
+                          <a:latin typeface="Calibri"/>
+                        </a:rPr>
+                        <a:t> · Cuestionario · 24%</a:t>
+                      </a:r>
+                    </a:p>
+                  </a:txBody>
+                  <a:tcPr anchor="ctr" marL="109728" marR="91440" marT="36576" marB="36576">
+                    <a:solidFill>
+                      <a:srgbClr val="F2F2F2"/>
+                    </a:solidFill>
+                  </a:tcPr>
+                </a:tc>
+                <a:tc>
+                  <a:txBody>
+                    <a:bodyPr/>
+                    <a:lstStyle/>
+                    <a:p>
+                      <a:pPr algn="l"/>
+                      <a:r>
+                        <a:rPr sz="1100" b="0" i="0">
+                          <a:solidFill>
+                            <a:srgbClr val="2B2B2B"/>
+                          </a:solidFill>
+                          <a:latin typeface="Calibri"/>
+                        </a:rPr>
+                        <a:t>Repasa </a:t>
+                      </a:r>
+                      <a:r>
+                        <a:rPr sz="1100" b="1" i="0">
+                          <a:solidFill>
+                            <a:srgbClr val="2B2B2B"/>
+                          </a:solidFill>
+                          <a:latin typeface="Calibri"/>
+                        </a:rPr>
+                        <a:t>estructura APA CUN</a:t>
+                      </a:r>
+                      <a:r>
+                        <a:rPr sz="1100" b="0" i="0">
+                          <a:solidFill>
+                            <a:srgbClr val="2B2B2B"/>
+                          </a:solidFill>
+                          <a:latin typeface="Calibri"/>
+                        </a:rPr>
+                        <a:t> y antecedentes Fase I, más pregunta, objetivos y título.</a:t>
+                      </a:r>
+                    </a:p>
+                  </a:txBody>
+                  <a:tcPr anchor="ctr" marL="109728" marR="91440" marT="36576" marB="36576">
+                    <a:solidFill>
+                      <a:srgbClr val="F2F2F2"/>
+                    </a:solidFill>
+                  </a:tcPr>
+                </a:tc>
+              </a:tr>
+              <a:tr h="477520">
+                <a:tc>
+                  <a:txBody>
+                    <a:bodyPr/>
+                    <a:lstStyle/>
+                    <a:p>
+                      <a:pPr algn="l"/>
+                      <a:r>
+                        <a:rPr sz="1100" b="1" i="0">
+                          <a:solidFill>
+                            <a:srgbClr val="2B2B2B"/>
+                          </a:solidFill>
+                          <a:latin typeface="Calibri"/>
+                        </a:rPr>
+                        <a:t>Sesión 07</a:t>
+                      </a:r>
+                      <a:r>
+                        <a:rPr sz="1100" b="0" i="0">
+                          <a:solidFill>
+                            <a:srgbClr val="2B2B2B"/>
+                          </a:solidFill>
+                          <a:latin typeface="Calibri"/>
+                        </a:rPr>
+                        <a:t> · cierra esta semana</a:t>
+                      </a:r>
+                    </a:p>
+                  </a:txBody>
+                  <a:tcPr anchor="ctr" marL="109728" marR="91440" marT="36576" marB="36576">
+                    <a:solidFill>
+                      <a:srgbClr val="FFFFFF"/>
+                    </a:solidFill>
+                  </a:tcPr>
+                </a:tc>
+                <a:tc>
+                  <a:txBody>
+                    <a:bodyPr/>
+                    <a:lstStyle/>
+                    <a:p>
+                      <a:pPr algn="l"/>
+                      <a:r>
+                        <a:rPr sz="1100" b="1" i="0">
+                          <a:solidFill>
+                            <a:srgbClr val="2B2B2B"/>
+                          </a:solidFill>
+                          <a:latin typeface="Calibri"/>
+                        </a:rPr>
+                        <a:t>Quiz 2</a:t>
+                      </a:r>
+                      <a:r>
+                        <a:rPr sz="1100" b="0" i="0">
+                          <a:solidFill>
+                            <a:srgbClr val="2B2B2B"/>
+                          </a:solidFill>
+                          <a:latin typeface="Calibri"/>
+                        </a:rPr>
+                        <a:t> · Cuestionario · 9%</a:t>
+                      </a:r>
+                    </a:p>
+                  </a:txBody>
+                  <a:tcPr anchor="ctr" marL="109728" marR="91440" marT="36576" marB="36576">
+                    <a:solidFill>
+                      <a:srgbClr val="FFFFFF"/>
+                    </a:solidFill>
+                  </a:tcPr>
+                </a:tc>
+                <a:tc>
+                  <a:txBody>
+                    <a:bodyPr/>
+                    <a:lstStyle/>
+                    <a:p>
+                      <a:pPr algn="l"/>
+                      <a:r>
+                        <a:rPr sz="1100" b="0" i="0">
+                          <a:solidFill>
+                            <a:srgbClr val="2B2B2B"/>
+                          </a:solidFill>
+                          <a:latin typeface="Calibri"/>
+                        </a:rPr>
+                        <a:t>Distingue </a:t>
+                      </a:r>
+                      <a:r>
+                        <a:rPr sz="1100" b="1" i="0">
+                          <a:solidFill>
+                            <a:srgbClr val="2B2B2B"/>
+                          </a:solidFill>
+                          <a:latin typeface="Calibri"/>
+                        </a:rPr>
+                        <a:t>marco teórico, conceptual y contextual</a:t>
+                      </a:r>
+                      <a:r>
+                        <a:rPr sz="1100" b="0" i="0">
+                          <a:solidFill>
+                            <a:srgbClr val="2B2B2B"/>
+                          </a:solidFill>
+                          <a:latin typeface="Calibri"/>
+                        </a:rPr>
+                        <a:t> y cómo se articulan con tu pregunta.</a:t>
+                      </a:r>
+                    </a:p>
+                  </a:txBody>
+                  <a:tcPr anchor="ctr" marL="109728" marR="91440" marT="36576" marB="36576">
+                    <a:solidFill>
+                      <a:srgbClr val="FFFFFF"/>
+                    </a:solidFill>
+                  </a:tcPr>
+                </a:tc>
+              </a:tr>
+              <a:tr h="477520">
+                <a:tc>
+                  <a:txBody>
+                    <a:bodyPr/>
+                    <a:lstStyle/>
+                    <a:p>
+                      <a:pPr algn="l"/>
+                      <a:r>
+                        <a:rPr sz="1100" b="1" i="0">
+                          <a:solidFill>
+                            <a:srgbClr val="2B2B2B"/>
+                          </a:solidFill>
+                          <a:latin typeface="Calibri"/>
+                        </a:rPr>
+                        <a:t>Sesión 08</a:t>
+                      </a:r>
+                      <a:r>
+                        <a:rPr sz="1100" b="0" i="0">
+                          <a:solidFill>
+                            <a:srgbClr val="2B2B2B"/>
+                          </a:solidFill>
+                          <a:latin typeface="Calibri"/>
+                        </a:rPr>
+                        <a:t> · pendiente</a:t>
+                      </a:r>
+                    </a:p>
+                  </a:txBody>
+                  <a:tcPr anchor="ctr" marL="109728" marR="91440" marT="36576" marB="36576">
+                    <a:solidFill>
+                      <a:srgbClr val="F2F2F2"/>
+                    </a:solidFill>
+                  </a:tcPr>
+                </a:tc>
+                <a:tc>
+                  <a:txBody>
+                    <a:bodyPr/>
+                    <a:lstStyle/>
+                    <a:p>
+                      <a:pPr algn="l"/>
+                      <a:r>
+                        <a:rPr sz="1100" b="1" i="0">
+                          <a:solidFill>
+                            <a:srgbClr val="2B2B2B"/>
+                          </a:solidFill>
+                          <a:latin typeface="Calibri"/>
+                        </a:rPr>
+                        <a:t>Parcial 2</a:t>
+                      </a:r>
+                      <a:r>
+                        <a:rPr sz="1100" b="0" i="0">
+                          <a:solidFill>
+                            <a:srgbClr val="2B2B2B"/>
+                          </a:solidFill>
+                          <a:latin typeface="Calibri"/>
+                        </a:rPr>
+                        <a:t> · Cuestionario · 21%</a:t>
+                      </a:r>
+                    </a:p>
+                  </a:txBody>
+                  <a:tcPr anchor="ctr" marL="109728" marR="91440" marT="36576" marB="36576">
+                    <a:solidFill>
+                      <a:srgbClr val="F2F2F2"/>
+                    </a:solidFill>
+                  </a:tcPr>
+                </a:tc>
+                <a:tc>
+                  <a:txBody>
+                    <a:bodyPr/>
+                    <a:lstStyle/>
+                    <a:p>
+                      <a:pPr algn="l"/>
+                      <a:r>
+                        <a:rPr sz="1100" b="0" i="0">
+                          <a:solidFill>
+                            <a:srgbClr val="2B2B2B"/>
+                          </a:solidFill>
+                          <a:latin typeface="Calibri"/>
+                        </a:rPr>
+                        <a:t>Repasa los tres marcos y el </a:t>
+                      </a:r>
+                      <a:r>
+                        <a:rPr sz="1100" b="1" i="0">
+                          <a:solidFill>
+                            <a:srgbClr val="2B2B2B"/>
+                          </a:solidFill>
+                          <a:latin typeface="Calibri"/>
+                        </a:rPr>
+                        <a:t>diseño metodológico</a:t>
+                      </a:r>
+                      <a:r>
+                        <a:rPr sz="1100" b="0" i="0">
+                          <a:solidFill>
+                            <a:srgbClr val="2B2B2B"/>
+                          </a:solidFill>
+                          <a:latin typeface="Calibri"/>
+                        </a:rPr>
+                        <a:t>: enfoque, tipo, alcance y diseño.</a:t>
+                      </a:r>
+                    </a:p>
+                  </a:txBody>
+                  <a:tcPr anchor="ctr" marL="109728" marR="91440" marT="36576" marB="36576">
+                    <a:solidFill>
+                      <a:srgbClr val="F2F2F2"/>
+                    </a:solidFill>
+                  </a:tcPr>
+                </a:tc>
+              </a:tr>
+              <a:tr h="477520">
+                <a:tc>
+                  <a:txBody>
+                    <a:bodyPr/>
+                    <a:lstStyle/>
+                    <a:p>
+                      <a:pPr algn="l"/>
+                      <a:r>
+                        <a:rPr sz="1100" b="1" i="0">
+                          <a:solidFill>
+                            <a:srgbClr val="2B2B2B"/>
+                          </a:solidFill>
+                          <a:latin typeface="Calibri"/>
+                        </a:rPr>
+                        <a:t>Sesión 10</a:t>
+                      </a:r>
+                      <a:r>
+                        <a:rPr sz="1100" b="0" i="0">
+                          <a:solidFill>
+                            <a:srgbClr val="2B2B2B"/>
+                          </a:solidFill>
+                          <a:latin typeface="Calibri"/>
+                        </a:rPr>
+                        <a:t> · pendiente</a:t>
+                      </a:r>
+                    </a:p>
+                  </a:txBody>
+                  <a:tcPr anchor="ctr" marL="109728" marR="91440" marT="36576" marB="36576">
+                    <a:solidFill>
+                      <a:srgbClr val="FFFFFF"/>
+                    </a:solidFill>
+                  </a:tcPr>
+                </a:tc>
+                <a:tc>
+                  <a:txBody>
+                    <a:bodyPr/>
+                    <a:lstStyle/>
+                    <a:p>
+                      <a:pPr algn="l"/>
+                      <a:r>
+                        <a:rPr sz="1100" b="1" i="0">
+                          <a:solidFill>
+                            <a:srgbClr val="2B2B2B"/>
+                          </a:solidFill>
+                          <a:latin typeface="Calibri"/>
+                        </a:rPr>
+                        <a:t>Quiz 3</a:t>
+                      </a:r>
+                      <a:r>
+                        <a:rPr sz="1100" b="0" i="0">
+                          <a:solidFill>
+                            <a:srgbClr val="2B2B2B"/>
+                          </a:solidFill>
+                          <a:latin typeface="Calibri"/>
+                        </a:rPr>
+                        <a:t> · Cuestionario · 4%</a:t>
+                      </a:r>
+                    </a:p>
+                  </a:txBody>
+                  <a:tcPr anchor="ctr" marL="109728" marR="91440" marT="36576" marB="36576">
+                    <a:solidFill>
+                      <a:srgbClr val="FFFFFF"/>
+                    </a:solidFill>
+                  </a:tcPr>
+                </a:tc>
+                <a:tc>
+                  <a:txBody>
+                    <a:bodyPr/>
+                    <a:lstStyle/>
+                    <a:p>
+                      <a:pPr algn="l"/>
+                      <a:r>
+                        <a:rPr sz="1100" b="0" i="0">
+                          <a:solidFill>
+                            <a:srgbClr val="2B2B2B"/>
+                          </a:solidFill>
+                          <a:latin typeface="Calibri"/>
+                        </a:rPr>
+                        <a:t>Ten claros </a:t>
+                      </a:r>
+                      <a:r>
+                        <a:rPr sz="1100" b="1" i="0">
+                          <a:solidFill>
+                            <a:srgbClr val="2B2B2B"/>
+                          </a:solidFill>
+                          <a:latin typeface="Calibri"/>
+                        </a:rPr>
+                        <a:t>instrumentos y plan de análisis</a:t>
+                      </a:r>
+                      <a:r>
+                        <a:rPr sz="1100" b="0" i="0">
+                          <a:solidFill>
+                            <a:srgbClr val="2B2B2B"/>
+                          </a:solidFill>
+                          <a:latin typeface="Calibri"/>
+                        </a:rPr>
+                        <a:t> propuestos y la integración del avance.</a:t>
+                      </a:r>
+                    </a:p>
+                  </a:txBody>
+                  <a:tcPr anchor="ctr" marL="109728" marR="91440" marT="36576" marB="36576">
+                    <a:solidFill>
+                      <a:srgbClr val="FFFFFF"/>
+                    </a:solidFill>
+                  </a:tcPr>
+                </a:tc>
+              </a:tr>
+              <a:tr h="477520">
+                <a:tc>
+                  <a:txBody>
+                    <a:bodyPr/>
+                    <a:lstStyle/>
+                    <a:p>
+                      <a:pPr algn="l"/>
+                      <a:r>
+                        <a:rPr sz="1100" b="1" i="0">
+                          <a:solidFill>
+                            <a:srgbClr val="2B2B2B"/>
+                          </a:solidFill>
+                          <a:latin typeface="Calibri"/>
+                        </a:rPr>
+                        <a:t>Sesión 11</a:t>
+                      </a:r>
+                      <a:r>
+                        <a:rPr sz="1100" b="0" i="0">
+                          <a:solidFill>
+                            <a:srgbClr val="2B2B2B"/>
+                          </a:solidFill>
+                          <a:latin typeface="Calibri"/>
+                        </a:rPr>
+                        <a:t> · pendiente</a:t>
+                      </a:r>
+                    </a:p>
+                  </a:txBody>
+                  <a:tcPr anchor="ctr" marL="109728" marR="91440" marT="36576" marB="36576">
+                    <a:solidFill>
+                      <a:srgbClr val="F2F2F2"/>
+                    </a:solidFill>
+                  </a:tcPr>
+                </a:tc>
+                <a:tc>
+                  <a:txBody>
+                    <a:bodyPr/>
+                    <a:lstStyle/>
+                    <a:p>
+                      <a:pPr algn="l"/>
+                      <a:r>
+                        <a:rPr sz="1100" b="1" i="0">
+                          <a:solidFill>
+                            <a:srgbClr val="2B2B2B"/>
+                          </a:solidFill>
+                          <a:latin typeface="Calibri"/>
+                        </a:rPr>
+                        <a:t>ACA Final</a:t>
+                      </a:r>
+                      <a:r>
+                        <a:rPr sz="1100" b="0" i="0">
+                          <a:solidFill>
+                            <a:srgbClr val="2B2B2B"/>
+                          </a:solidFill>
+                          <a:latin typeface="Calibri"/>
+                        </a:rPr>
+                        <a:t> · Tarea · 32,8%</a:t>
+                      </a:r>
+                    </a:p>
+                  </a:txBody>
+                  <a:tcPr anchor="ctr" marL="109728" marR="91440" marT="36576" marB="36576">
+                    <a:solidFill>
+                      <a:srgbClr val="F2F2F2"/>
+                    </a:solidFill>
+                  </a:tcPr>
+                </a:tc>
+                <a:tc>
+                  <a:txBody>
+                    <a:bodyPr/>
+                    <a:lstStyle/>
+                    <a:p>
+                      <a:pPr algn="l"/>
+                      <a:r>
+                        <a:rPr sz="1100" b="0" i="0">
+                          <a:solidFill>
+                            <a:srgbClr val="2B2B2B"/>
+                          </a:solidFill>
+                          <a:latin typeface="Calibri"/>
+                        </a:rPr>
+                        <a:t>Sube el </a:t>
+                      </a:r>
+                      <a:r>
+                        <a:rPr sz="1100" b="1" i="0">
+                          <a:solidFill>
+                            <a:srgbClr val="2B2B2B"/>
+                          </a:solidFill>
+                          <a:latin typeface="Calibri"/>
+                        </a:rPr>
+                        <a:t>avance consolidado</a:t>
+                      </a:r>
+                      <a:r>
+                        <a:rPr sz="1100" b="0" i="0">
+                          <a:solidFill>
+                            <a:srgbClr val="2B2B2B"/>
+                          </a:solidFill>
+                          <a:latin typeface="Calibri"/>
+                        </a:rPr>
+                        <a:t> en plantilla APA CUN, integrado y listo para TG3.</a:t>
+                      </a:r>
+                    </a:p>
+                  </a:txBody>
+                  <a:tcPr anchor="ctr" marL="109728" marR="91440" marT="36576" marB="36576">
+                    <a:solidFill>
+                      <a:srgbClr val="F2F2F2"/>
+                    </a:solidFill>
+                  </a:tcPr>
+                </a:tc>
+              </a:tr>
+              <a:tr h="477520">
+                <a:tc>
+                  <a:txBody>
+                    <a:bodyPr/>
+                    <a:lstStyle/>
+                    <a:p>
+                      <a:pPr algn="l"/>
+                      <a:r>
+                        <a:rPr sz="1100" b="1" i="0">
+                          <a:solidFill>
+                            <a:srgbClr val="2B2B2B"/>
+                          </a:solidFill>
+                          <a:latin typeface="Calibri"/>
+                        </a:rPr>
+                        <a:t>Sesión 11</a:t>
+                      </a:r>
+                      <a:r>
+                        <a:rPr sz="1100" b="0" i="0">
+                          <a:solidFill>
+                            <a:srgbClr val="2B2B2B"/>
+                          </a:solidFill>
+                          <a:latin typeface="Calibri"/>
+                        </a:rPr>
+                        <a:t> · pendiente</a:t>
+                      </a:r>
+                    </a:p>
+                  </a:txBody>
+                  <a:tcPr anchor="ctr" marL="109728" marR="91440" marT="36576" marB="36576">
+                    <a:solidFill>
+                      <a:srgbClr val="FFFFFF"/>
+                    </a:solidFill>
+                  </a:tcPr>
+                </a:tc>
+                <a:tc>
+                  <a:txBody>
+                    <a:bodyPr/>
+                    <a:lstStyle/>
+                    <a:p>
+                      <a:pPr algn="l"/>
+                      <a:r>
+                        <a:rPr sz="1100" b="1" i="0">
+                          <a:solidFill>
+                            <a:srgbClr val="2B2B2B"/>
+                          </a:solidFill>
+                          <a:latin typeface="Calibri"/>
+                        </a:rPr>
+                        <a:t>Autoevaluación</a:t>
+                      </a:r>
+                      <a:r>
+                        <a:rPr sz="1100" b="0" i="0">
+                          <a:solidFill>
+                            <a:srgbClr val="2B2B2B"/>
+                          </a:solidFill>
+                          <a:latin typeface="Calibri"/>
+                        </a:rPr>
+                        <a:t> · Cuestionario · 1,6%</a:t>
+                      </a:r>
+                    </a:p>
+                  </a:txBody>
+                  <a:tcPr anchor="ctr" marL="109728" marR="91440" marT="36576" marB="36576">
+                    <a:solidFill>
+                      <a:srgbClr val="FFFFFF"/>
+                    </a:solidFill>
+                  </a:tcPr>
+                </a:tc>
+                <a:tc>
+                  <a:txBody>
+                    <a:bodyPr/>
+                    <a:lstStyle/>
+                    <a:p>
+                      <a:pPr algn="l"/>
+                      <a:r>
+                        <a:rPr sz="1100" b="0" i="0">
+                          <a:solidFill>
+                            <a:srgbClr val="2B2B2B"/>
+                          </a:solidFill>
+                          <a:latin typeface="Calibri"/>
+                        </a:rPr>
+                        <a:t>Diligénciala tú, de forma </a:t>
+                      </a:r>
+                      <a:r>
+                        <a:rPr sz="1100" b="1" i="0">
+                          <a:solidFill>
+                            <a:srgbClr val="2B2B2B"/>
+                          </a:solidFill>
+                          <a:latin typeface="Calibri"/>
+                        </a:rPr>
+                        <a:t>individual</a:t>
+                      </a:r>
+                      <a:r>
+                        <a:rPr sz="1100" b="0" i="0">
+                          <a:solidFill>
+                            <a:srgbClr val="2B2B2B"/>
+                          </a:solidFill>
+                          <a:latin typeface="Calibri"/>
+                        </a:rPr>
+                        <a:t>, valorando tu participación real.</a:t>
+                      </a:r>
+                    </a:p>
+                  </a:txBody>
+                  <a:tcPr anchor="ctr" marL="109728" marR="91440" marT="36576" marB="36576">
+                    <a:solidFill>
+                      <a:srgbClr val="FFFFFF"/>
+                    </a:solidFill>
+                  </a:tcPr>
+                </a:tc>
+              </a:tr>
+              <a:tr h="477520">
+                <a:tc>
+                  <a:txBody>
+                    <a:bodyPr/>
+                    <a:lstStyle/>
+                    <a:p>
+                      <a:pPr algn="l"/>
+                      <a:r>
+                        <a:rPr sz="1100" b="1" i="0">
+                          <a:solidFill>
+                            <a:srgbClr val="2B2B2B"/>
+                          </a:solidFill>
+                          <a:latin typeface="Calibri"/>
+                        </a:rPr>
+                        <a:t>Sesión 11</a:t>
+                      </a:r>
+                      <a:r>
+                        <a:rPr sz="1100" b="0" i="0">
+                          <a:solidFill>
+                            <a:srgbClr val="2B2B2B"/>
+                          </a:solidFill>
+                          <a:latin typeface="Calibri"/>
+                        </a:rPr>
+                        <a:t> · pendiente</a:t>
+                      </a:r>
+                    </a:p>
+                  </a:txBody>
+                  <a:tcPr anchor="ctr" marL="109728" marR="91440" marT="36576" marB="36576">
+                    <a:solidFill>
+                      <a:srgbClr val="F2F2F2"/>
+                    </a:solidFill>
+                  </a:tcPr>
+                </a:tc>
+                <a:tc>
+                  <a:txBody>
+                    <a:bodyPr/>
+                    <a:lstStyle/>
+                    <a:p>
+                      <a:pPr algn="l"/>
+                      <a:r>
+                        <a:rPr sz="1100" b="1" i="0">
+                          <a:solidFill>
+                            <a:srgbClr val="2B2B2B"/>
+                          </a:solidFill>
+                          <a:latin typeface="Calibri"/>
+                        </a:rPr>
+                        <a:t>Coevaluación</a:t>
+                      </a:r>
+                      <a:r>
+                        <a:rPr sz="1100" b="0" i="0">
+                          <a:solidFill>
+                            <a:srgbClr val="2B2B2B"/>
+                          </a:solidFill>
+                          <a:latin typeface="Calibri"/>
+                        </a:rPr>
+                        <a:t> · Foro · 1,6%</a:t>
+                      </a:r>
+                    </a:p>
+                  </a:txBody>
+                  <a:tcPr anchor="ctr" marL="109728" marR="91440" marT="36576" marB="36576">
+                    <a:solidFill>
+                      <a:srgbClr val="F2F2F2"/>
+                    </a:solidFill>
+                  </a:tcPr>
+                </a:tc>
+                <a:tc>
+                  <a:txBody>
+                    <a:bodyPr/>
+                    <a:lstStyle/>
+                    <a:p>
+                      <a:pPr algn="l"/>
+                      <a:r>
+                        <a:rPr sz="1100" b="1" i="0">
+                          <a:solidFill>
+                            <a:srgbClr val="2B2B2B"/>
+                          </a:solidFill>
+                          <a:latin typeface="Calibri"/>
+                        </a:rPr>
+                        <a:t>Publica</a:t>
+                      </a:r>
+                      <a:r>
+                        <a:rPr sz="1100" b="0" i="0">
+                          <a:solidFill>
+                            <a:srgbClr val="2B2B2B"/>
+                          </a:solidFill>
+                          <a:latin typeface="Calibri"/>
+                        </a:rPr>
+                        <a:t> tu aporte: valora hechos del trabajo del equipo, nunca a las personas.</a:t>
+                      </a:r>
+                    </a:p>
+                  </a:txBody>
+                  <a:tcPr anchor="ctr" marL="109728" marR="91440" marT="36576" marB="36576">
+                    <a:solidFill>
+                      <a:srgbClr val="F2F2F2"/>
+                    </a:solidFill>
+                  </a:tcPr>
+                </a:tc>
+              </a:tr>
+            </a:tbl>
+          </a:graphicData>
+        </a:graphic>
+      </p:graphicFrame>
+      <p:sp>
+        <p:nvSpPr>
+          <p:cNvPr id="6" name="TextBox 5"/>
+          <p:cNvSpPr txBox="1"/>
+          <p:nvPr/>
+        </p:nvSpPr>
+        <p:spPr>
+          <a:xfrm>
+            <a:off x="640080" y="6080760"/>
+            <a:ext cx="10911535" cy="548640"/>
+          </a:xfrm>
+          <a:prstGeom prst="rect">
+            <a:avLst/>
+          </a:prstGeom>
+          <a:noFill/>
+        </p:spPr>
+        <p:txBody>
+          <a:bodyPr wrap="square" anchor="t" lIns="0" rIns="0" tIns="0" bIns="0">
+            <a:spAutoFit/>
+          </a:bodyPr>
+          <a:lstStyle/>
+          <a:p>
+            <a:r>
+              <a:rPr sz="1200" b="0" i="1">
+                <a:solidFill>
+                  <a:srgbClr val="2B2B2B"/>
+                </a:solidFill>
+                <a:latin typeface="Calibri"/>
+              </a:rPr>
+              <a:t>Esta misma tabla va al final de todas las sesiones. La </a:t>
+            </a:r>
+            <a:r>
+              <a:rPr sz="1200" b="1" i="1">
+                <a:solidFill>
+                  <a:srgbClr val="2B2B2B"/>
+                </a:solidFill>
+                <a:latin typeface="Calibri"/>
+              </a:rPr>
+              <a:t>fecha</a:t>
+            </a:r>
+            <a:r>
+              <a:rPr sz="1200" b="0" i="1">
+                <a:solidFill>
+                  <a:srgbClr val="2B2B2B"/>
+                </a:solidFill>
+                <a:latin typeface="Calibri"/>
+              </a:rPr>
+              <a:t> de cada ventana está en el enunciado del ítem (`Clases/Recursos/ACAs/`) y en el aula: si el aula y cualquier otro material se contradicen, </a:t>
+            </a:r>
+            <a:r>
+              <a:rPr sz="1200" b="1" i="1">
+                <a:solidFill>
+                  <a:srgbClr val="2B2B2B"/>
+                </a:solidFill>
+                <a:latin typeface="Calibri"/>
+              </a:rPr>
+              <a:t>manda el aula</a:t>
+            </a:r>
+            <a:r>
+              <a:rPr sz="1200" b="0" i="1">
+                <a:solidFill>
+                  <a:srgbClr val="2B2B2B"/>
+                </a:solidFill>
+                <a:latin typeface="Calibri"/>
+              </a:rPr>
+              <a:t>.</a:t>
+            </a:r>
+          </a:p>
+        </p:txBody>
+      </p:sp>
+      <p:sp>
+        <p:nvSpPr>
+          <p:cNvPr id="7" name="TextBox 6"/>
+          <p:cNvSpPr txBox="1"/>
+          <p:nvPr/>
+        </p:nvSpPr>
+        <p:spPr>
+          <a:xfrm>
+            <a:off x="11094415" y="6446520"/>
+            <a:ext cx="548640" cy="274320"/>
+          </a:xfrm>
+          <a:prstGeom prst="rect">
+            <a:avLst/>
+          </a:prstGeom>
+          <a:noFill/>
+        </p:spPr>
+        <p:txBody>
+          <a:bodyPr wrap="square" anchor="t" lIns="0" rIns="0" tIns="0" bIns="0">
+            <a:spAutoFit/>
+          </a:bodyPr>
+          <a:lstStyle/>
+          <a:p>
+            <a:pPr algn="r"/>
+            <a:r>
+              <a:rPr sz="1000" b="1" i="0">
+                <a:solidFill>
+                  <a:srgbClr val="8F989D"/>
+                </a:solidFill>
+                <a:latin typeface="Calibri"/>
+              </a:rPr>
+              <a:t>19</a:t>
+            </a:r>
+          </a:p>
+        </p:txBody>
+      </p:sp>
+    </p:spTree>
+  </p:cSld>
+  <p:clrMapOvr>
+    <a:masterClrMapping/>
+  </p:clrMapOvr>
+</p:sld>
+</file>
+
+<file path=ppt/slides/slide2.xml><?xml version="1.0" encoding="utf-8"?>
+<p:sld xmlns:a="http://schemas.openxmlformats.org/drawingml/2006/main" xmlns:p="http://schemas.openxmlformats.org/presentationml/2006/main" xmlns:r="http://schemas.openxmlformats.org/officeDocument/2006/relationships">
+  <p:cSld>
+    <p:bg>
+      <p:bgPr>
+        <a:solidFill>
+          <a:srgbClr val="FFFFFF"/>
+        </a:solidFill>
+        <a:effectLst/>
+      </p:bgPr>
+    </p:bg>
+    <p:spTree>
+      <p:nvGrpSpPr>
+        <p:cNvPr id="1" name=""/>
+        <p:cNvGrpSpPr/>
+        <p:nvPr/>
+      </p:nvGrpSpPr>
+      <p:grpSpPr/>
+      <p:sp>
+        <p:nvSpPr>
+          <p:cNvPr id="2" name="Rectangle 1"/>
+          <p:cNvSpPr/>
+          <p:nvPr/>
+        </p:nvSpPr>
+        <p:spPr>
+          <a:xfrm>
+            <a:off x="0" y="0"/>
+            <a:ext cx="12191695" cy="1188720"/>
+          </a:xfrm>
+          <a:prstGeom prst="rect">
+            <a:avLst/>
+          </a:prstGeom>
+          <a:solidFill>
+            <a:srgbClr val="0C2340"/>
+          </a:solidFill>
+          <a:ln>
+            <a:noFill/>
+          </a:ln>
+          <a:effectLst/>
+        </p:spPr>
+        <p:style>
+          <a:lnRef idx="1">
+            <a:schemeClr val="accent1"/>
+          </a:lnRef>
+          <a:fillRef idx="3">
+            <a:schemeClr val="accent1"/>
+          </a:fillRef>
+          <a:effectRef idx="2">
+            <a:schemeClr val="accent1"/>
+          </a:effectRef>
+          <a:fontRef idx="minor">
+            <a:schemeClr val="lt1"/>
+          </a:fontRef>
+        </p:style>
+        <p:txBody>
+          <a:bodyPr rtlCol="0" anchor="ctr"/>
+          <a:lstStyle/>
+          <a:p>
+            <a:pPr algn="ctr"/>
+          </a:p>
+        </p:txBody>
+      </p:sp>
+      <p:sp>
+        <p:nvSpPr>
+          <p:cNvPr id="3" name="TextBox 2"/>
+          <p:cNvSpPr txBox="1"/>
+          <p:nvPr/>
+        </p:nvSpPr>
+        <p:spPr>
+          <a:xfrm>
+            <a:off x="640080" y="0"/>
+            <a:ext cx="9082735" cy="1188720"/>
+          </a:xfrm>
+          <a:prstGeom prst="rect">
+            <a:avLst/>
+          </a:prstGeom>
+          <a:noFill/>
+        </p:spPr>
+        <p:txBody>
+          <a:bodyPr wrap="square" anchor="ctr" lIns="0" rIns="0" tIns="0" bIns="0">
+            <a:spAutoFit/>
+          </a:bodyPr>
+          <a:lstStyle/>
+          <a:p>
+            <a:pPr algn="ctr"/>
+            <a:r>
+              <a:rPr sz="2600" b="1" i="0">
+                <a:solidFill>
+                  <a:srgbClr val="FFFFFF"/>
+                </a:solidFill>
+                <a:latin typeface="Calibri"/>
+              </a:rPr>
+              <a:t>Del 'qué' al 'cómo': hoy se decide la ruta</a:t>
+            </a:r>
+          </a:p>
+        </p:txBody>
+      </p:sp>
+      <p:sp>
+        <p:nvSpPr>
+          <p:cNvPr id="4" name="TextBox 3"/>
+          <p:cNvSpPr txBox="1"/>
+          <p:nvPr/>
+        </p:nvSpPr>
+        <p:spPr>
+          <a:xfrm>
+            <a:off x="640080" y="1691639"/>
+            <a:ext cx="10911535" cy="4617720"/>
+          </a:xfrm>
+          <a:prstGeom prst="rect">
+            <a:avLst/>
+          </a:prstGeom>
+          <a:noFill/>
+        </p:spPr>
+        <p:txBody>
+          <a:bodyPr wrap="square" anchor="t" lIns="0" rIns="0" tIns="0" bIns="0">
+            <a:spAutoFit/>
+          </a:bodyPr>
+          <a:lstStyle/>
+          <a:p>
+            <a:pPr>
+              <a:spcAft>
+                <a:spcPts val="1000"/>
+              </a:spcAft>
+            </a:pPr>
+            <a:r>
+              <a:rPr sz="1600" b="0" i="0">
+                <a:solidFill>
+                  <a:srgbClr val="2B2B2B"/>
+                </a:solidFill>
+                <a:latin typeface="Calibri"/>
+              </a:rPr>
+              <a:t>–   Ya tienen el </a:t>
+            </a:r>
+            <a:r>
+              <a:rPr sz="1600" b="1" i="0">
+                <a:solidFill>
+                  <a:srgbClr val="2B2B2B"/>
+                </a:solidFill>
+                <a:latin typeface="Calibri"/>
+              </a:rPr>
+              <a:t>qué</a:t>
+            </a:r>
+            <a:r>
+              <a:rPr sz="1600" b="0" i="0">
+                <a:solidFill>
+                  <a:srgbClr val="2B2B2B"/>
+                </a:solidFill>
+                <a:latin typeface="Calibri"/>
+              </a:rPr>
+              <a:t>: problema, pregunta, objetivos y marco. Falta lo primero que pregunta un jurado: </a:t>
+            </a:r>
+            <a:r>
+              <a:rPr sz="1600" b="1" i="0">
+                <a:solidFill>
+                  <a:srgbClr val="2B2B2B"/>
+                </a:solidFill>
+                <a:latin typeface="Calibri"/>
+              </a:rPr>
+              <a:t>¿y cómo lo va a responder?</a:t>
+            </a:r>
+          </a:p>
+          <a:p>
+            <a:pPr lvl="1">
+              <a:spcAft>
+                <a:spcPts val="600"/>
+              </a:spcAft>
+            </a:pPr>
+            <a:r>
+              <a:rPr sz="1500" b="0" i="0">
+                <a:solidFill>
+                  <a:srgbClr val="2B2B2B"/>
+                </a:solidFill>
+                <a:latin typeface="Calibri"/>
+              </a:rPr>
+              <a:t>●   Un marco impecable con una metodología floja no sostiene un trabajo de grado.</a:t>
+            </a:r>
+          </a:p>
+          <a:p>
+            <a:pPr>
+              <a:spcAft>
+                <a:spcPts val="1000"/>
+              </a:spcAft>
+            </a:pPr>
+            <a:r>
+              <a:rPr sz="1600" b="0" i="0">
+                <a:solidFill>
+                  <a:srgbClr val="2B2B2B"/>
+                </a:solidFill>
+                <a:latin typeface="Calibri"/>
+              </a:rPr>
+              <a:t>–   Caso que usaremos toda la sesión: una empresa de servicios de Bogotá </a:t>
+            </a:r>
+            <a:r>
+              <a:rPr sz="1600" b="1" i="0">
+                <a:solidFill>
+                  <a:srgbClr val="2B2B2B"/>
+                </a:solidFill>
+                <a:latin typeface="Calibri"/>
+              </a:rPr>
+              <a:t>clasifica a mano los tickets</a:t>
+            </a:r>
+            <a:r>
+              <a:rPr sz="1600" b="0" i="0">
+                <a:solidFill>
+                  <a:srgbClr val="2B2B2B"/>
+                </a:solidFill>
+                <a:latin typeface="Calibri"/>
+              </a:rPr>
+              <a:t> de su mesa de ayuda y la atención se demora.</a:t>
+            </a:r>
+          </a:p>
+          <a:p>
+            <a:pPr lvl="1">
+              <a:spcAft>
+                <a:spcPts val="600"/>
+              </a:spcAft>
+            </a:pPr>
+            <a:r>
+              <a:rPr sz="1500" b="0" i="0">
+                <a:solidFill>
+                  <a:srgbClr val="2B2B2B"/>
+                </a:solidFill>
+                <a:latin typeface="Calibri"/>
+              </a:rPr>
+              <a:t>●   Pregunta del proyecto: ¿en qué medida un clasificador automático reduce el tiempo de atención de los tickets?</a:t>
+            </a:r>
+          </a:p>
+          <a:p>
+            <a:pPr>
+              <a:spcAft>
+                <a:spcPts val="1000"/>
+              </a:spcAft>
+            </a:pPr>
+            <a:r>
+              <a:rPr sz="1600" b="0" i="0">
+                <a:solidFill>
+                  <a:srgbClr val="2B2B2B"/>
+                </a:solidFill>
+                <a:latin typeface="Calibri"/>
+              </a:rPr>
+              <a:t>–   El </a:t>
+            </a:r>
+            <a:r>
+              <a:rPr sz="1600" b="1" i="0">
+                <a:solidFill>
+                  <a:srgbClr val="2B2B2B"/>
+                </a:solidFill>
+                <a:latin typeface="Calibri"/>
+              </a:rPr>
+              <a:t>diseño metodológico</a:t>
+            </a:r>
+            <a:r>
+              <a:rPr sz="1600" b="0" i="0">
+                <a:solidFill>
+                  <a:srgbClr val="2B2B2B"/>
+                </a:solidFill>
+                <a:latin typeface="Calibri"/>
+              </a:rPr>
+              <a:t> es el plan para conseguir y analizar la evidencia que responde esa pregunta.</a:t>
+            </a:r>
+          </a:p>
+          <a:p>
+            <a:pPr>
+              <a:spcAft>
+                <a:spcPts val="1000"/>
+              </a:spcAft>
+            </a:pPr>
+            <a:r>
+              <a:rPr sz="1600" b="0" i="0">
+                <a:solidFill>
+                  <a:srgbClr val="2B2B2B"/>
+                </a:solidFill>
+                <a:latin typeface="Calibri"/>
+              </a:rPr>
+              <a:t>–   Regla que atraviesa toda la sesión: en TG2 la metodología se </a:t>
+            </a:r>
+            <a:r>
+              <a:rPr sz="1600" b="1" i="0">
+                <a:solidFill>
+                  <a:srgbClr val="2B2B2B"/>
+                </a:solidFill>
+                <a:latin typeface="Calibri"/>
+              </a:rPr>
+              <a:t>propone</a:t>
+            </a:r>
+            <a:r>
+              <a:rPr sz="1600" b="0" i="0">
+                <a:solidFill>
+                  <a:srgbClr val="2B2B2B"/>
+                </a:solidFill>
+                <a:latin typeface="Calibri"/>
+              </a:rPr>
+              <a:t>; el trabajo de campo es de TG3.</a:t>
+            </a:r>
+          </a:p>
+          <a:p>
+            <a:pPr lvl="1">
+              <a:spcAft>
+                <a:spcPts val="600"/>
+              </a:spcAft>
+            </a:pPr>
+            <a:r>
+              <a:rPr sz="1500" b="0" i="0">
+                <a:solidFill>
+                  <a:srgbClr val="2B2B2B"/>
+                </a:solidFill>
+                <a:latin typeface="Calibri"/>
+              </a:rPr>
+              <a:t>●   Hoy se escribe 'se propone', 'se aplicará', 'se seleccionará'. Nunca 'se aplicó'.</a:t>
+            </a:r>
+          </a:p>
+        </p:txBody>
+      </p:sp>
+      <p:sp>
+        <p:nvSpPr>
+          <p:cNvPr id="5" name="TextBox 4"/>
+          <p:cNvSpPr txBox="1"/>
+          <p:nvPr/>
+        </p:nvSpPr>
+        <p:spPr>
+          <a:xfrm>
+            <a:off x="11094415" y="6446520"/>
+            <a:ext cx="548640" cy="274320"/>
+          </a:xfrm>
+          <a:prstGeom prst="rect">
+            <a:avLst/>
+          </a:prstGeom>
+          <a:noFill/>
+        </p:spPr>
+        <p:txBody>
+          <a:bodyPr wrap="square" anchor="t" lIns="0" rIns="0" tIns="0" bIns="0">
+            <a:spAutoFit/>
+          </a:bodyPr>
+          <a:lstStyle/>
+          <a:p>
+            <a:pPr algn="r"/>
+            <a:r>
+              <a:rPr sz="1000" b="1" i="0">
+                <a:solidFill>
+                  <a:srgbClr val="8F989D"/>
+                </a:solidFill>
+                <a:latin typeface="Calibri"/>
+              </a:rPr>
+              <a:t>2</a:t>
+            </a:r>
+          </a:p>
+        </p:txBody>
+      </p:sp>
+      <p:sp>
+        <p:nvSpPr>
+          <p:cNvPr id="6" name="TextBox 5"/>
+          <p:cNvSpPr txBox="1"/>
+          <p:nvPr/>
+        </p:nvSpPr>
+        <p:spPr>
+          <a:xfrm>
+            <a:off x="640080" y="5943600"/>
+            <a:ext cx="9997135" cy="457200"/>
+          </a:xfrm>
+          <a:prstGeom prst="rect">
+            <a:avLst/>
+          </a:prstGeom>
+          <a:noFill/>
+        </p:spPr>
+        <p:txBody>
+          <a:bodyPr wrap="square" anchor="t" lIns="0" rIns="0" tIns="0" bIns="0">
+            <a:spAutoFit/>
+          </a:bodyPr>
+          <a:lstStyle/>
+          <a:p>
+            <a:r>
+              <a:rPr sz="1200" b="0" i="1">
+                <a:solidFill>
+                  <a:srgbClr val="2B2B2B"/>
+                </a:solidFill>
+                <a:latin typeface="Calibri"/>
+              </a:rPr>
+              <a:t>Salida esperada de hoy: una ficha metodológica (enfoque + alcance + diseño) y una matriz pregunta–método completa.</a:t>
+            </a:r>
+          </a:p>
+        </p:txBody>
+      </p:sp>
+    </p:spTree>
+  </p:cSld>
+  <p:clrMapOvr>
+    <a:masterClrMapping/>
+  </p:clrMapOvr>
+</p:sld>
+</file>
+
+<file path=ppt/slides/slide20.xml><?xml version="1.0" encoding="utf-8"?>
 <p:sld xmlns:a="http://schemas.openxmlformats.org/drawingml/2006/main" xmlns:p="http://schemas.openxmlformats.org/presentationml/2006/main" xmlns:r="http://schemas.openxmlformats.org/officeDocument/2006/relationships">
   <p:cSld>
     <p:bg>
@@ -6904,396 +9006,6 @@
                 <a:latin typeface="Calibri"/>
               </a:rPr>
               <a:t>TRABAJO DE GRADO 2</a:t>
-            </a:r>
-          </a:p>
-        </p:txBody>
-      </p:sp>
-    </p:spTree>
-  </p:cSld>
-  <p:clrMapOvr>
-    <a:masterClrMapping/>
-  </p:clrMapOvr>
-</p:sld>
-</file>
-
-<file path=ppt/slides/slide2.xml><?xml version="1.0" encoding="utf-8"?>
-<p:sld xmlns:a="http://schemas.openxmlformats.org/drawingml/2006/main" xmlns:p="http://schemas.openxmlformats.org/presentationml/2006/main" xmlns:r="http://schemas.openxmlformats.org/officeDocument/2006/relationships">
-  <p:cSld>
-    <p:bg>
-      <p:bgPr>
-        <a:solidFill>
-          <a:srgbClr val="FFFFFF"/>
-        </a:solidFill>
-        <a:effectLst/>
-      </p:bgPr>
-    </p:bg>
-    <p:spTree>
-      <p:nvGrpSpPr>
-        <p:cNvPr id="1" name=""/>
-        <p:cNvGrpSpPr/>
-        <p:nvPr/>
-      </p:nvGrpSpPr>
-      <p:grpSpPr/>
-      <p:sp>
-        <p:nvSpPr>
-          <p:cNvPr id="2" name="Rectangle 1"/>
-          <p:cNvSpPr/>
-          <p:nvPr/>
-        </p:nvSpPr>
-        <p:spPr>
-          <a:xfrm>
-            <a:off x="0" y="0"/>
-            <a:ext cx="12191695" cy="1188720"/>
-          </a:xfrm>
-          <a:prstGeom prst="rect">
-            <a:avLst/>
-          </a:prstGeom>
-          <a:solidFill>
-            <a:srgbClr val="0C2340"/>
-          </a:solidFill>
-          <a:ln>
-            <a:noFill/>
-          </a:ln>
-          <a:effectLst/>
-        </p:spPr>
-        <p:style>
-          <a:lnRef idx="1">
-            <a:schemeClr val="accent1"/>
-          </a:lnRef>
-          <a:fillRef idx="3">
-            <a:schemeClr val="accent1"/>
-          </a:fillRef>
-          <a:effectRef idx="2">
-            <a:schemeClr val="accent1"/>
-          </a:effectRef>
-          <a:fontRef idx="minor">
-            <a:schemeClr val="lt1"/>
-          </a:fontRef>
-        </p:style>
-        <p:txBody>
-          <a:bodyPr rtlCol="0" anchor="ctr"/>
-          <a:lstStyle/>
-          <a:p>
-            <a:pPr algn="ctr"/>
-          </a:p>
-        </p:txBody>
-      </p:sp>
-      <p:sp>
-        <p:nvSpPr>
-          <p:cNvPr id="3" name="TextBox 2"/>
-          <p:cNvSpPr txBox="1"/>
-          <p:nvPr/>
-        </p:nvSpPr>
-        <p:spPr>
-          <a:xfrm>
-            <a:off x="640080" y="0"/>
-            <a:ext cx="9082735" cy="1188720"/>
-          </a:xfrm>
-          <a:prstGeom prst="rect">
-            <a:avLst/>
-          </a:prstGeom>
-          <a:noFill/>
-        </p:spPr>
-        <p:txBody>
-          <a:bodyPr wrap="square" anchor="ctr" lIns="0" rIns="0" tIns="0" bIns="0">
-            <a:spAutoFit/>
-          </a:bodyPr>
-          <a:lstStyle/>
-          <a:p>
-            <a:pPr algn="ctr"/>
-            <a:r>
-              <a:rPr sz="2600" b="1" i="0">
-                <a:solidFill>
-                  <a:srgbClr val="FFFFFF"/>
-                </a:solidFill>
-                <a:latin typeface="Calibri"/>
-              </a:rPr>
-              <a:t>Del 'qué' al 'cómo': hoy se decide la ruta</a:t>
-            </a:r>
-          </a:p>
-        </p:txBody>
-      </p:sp>
-      <p:sp>
-        <p:nvSpPr>
-          <p:cNvPr id="4" name="TextBox 3"/>
-          <p:cNvSpPr txBox="1"/>
-          <p:nvPr/>
-        </p:nvSpPr>
-        <p:spPr>
-          <a:xfrm>
-            <a:off x="640080" y="1691639"/>
-            <a:ext cx="10911535" cy="4617720"/>
-          </a:xfrm>
-          <a:prstGeom prst="rect">
-            <a:avLst/>
-          </a:prstGeom>
-          <a:noFill/>
-        </p:spPr>
-        <p:txBody>
-          <a:bodyPr wrap="square" anchor="t" lIns="0" rIns="0" tIns="0" bIns="0">
-            <a:spAutoFit/>
-          </a:bodyPr>
-          <a:lstStyle/>
-          <a:p>
-            <a:pPr>
-              <a:spcAft>
-                <a:spcPts val="1000"/>
-              </a:spcAft>
-            </a:pPr>
-            <a:r>
-              <a:rPr sz="1600" b="0" i="0">
-                <a:solidFill>
-                  <a:srgbClr val="2B2B2B"/>
-                </a:solidFill>
-                <a:latin typeface="Calibri"/>
-              </a:rPr>
-              <a:t>–   Ya tienen el </a:t>
-            </a:r>
-            <a:r>
-              <a:rPr sz="1600" b="1" i="0">
-                <a:solidFill>
-                  <a:srgbClr val="2B2B2B"/>
-                </a:solidFill>
-                <a:latin typeface="Calibri"/>
-              </a:rPr>
-              <a:t>qué</a:t>
-            </a:r>
-            <a:r>
-              <a:rPr sz="1600" b="0" i="0">
-                <a:solidFill>
-                  <a:srgbClr val="2B2B2B"/>
-                </a:solidFill>
-                <a:latin typeface="Calibri"/>
-              </a:rPr>
-              <a:t>: problema, pregunta, objetivos y marco. Falta lo primero que pregunta un jurado: </a:t>
-            </a:r>
-            <a:r>
-              <a:rPr sz="1600" b="1" i="0">
-                <a:solidFill>
-                  <a:srgbClr val="2B2B2B"/>
-                </a:solidFill>
-                <a:latin typeface="Calibri"/>
-              </a:rPr>
-              <a:t>¿y cómo lo va a responder?</a:t>
-            </a:r>
-          </a:p>
-          <a:p>
-            <a:pPr lvl="1">
-              <a:spcAft>
-                <a:spcPts val="600"/>
-              </a:spcAft>
-            </a:pPr>
-            <a:r>
-              <a:rPr sz="1500" b="0" i="0">
-                <a:solidFill>
-                  <a:srgbClr val="2B2B2B"/>
-                </a:solidFill>
-                <a:latin typeface="Calibri"/>
-              </a:rPr>
-              <a:t>●   Un marco impecable con una metodología floja no sostiene un trabajo de grado.</a:t>
-            </a:r>
-          </a:p>
-          <a:p>
-            <a:pPr>
-              <a:spcAft>
-                <a:spcPts val="1000"/>
-              </a:spcAft>
-            </a:pPr>
-            <a:r>
-              <a:rPr sz="1600" b="0" i="0">
-                <a:solidFill>
-                  <a:srgbClr val="2B2B2B"/>
-                </a:solidFill>
-                <a:latin typeface="Calibri"/>
-              </a:rPr>
-              <a:t>–   Caso que usaremos toda la sesión: una empresa de servicios de Bogotá </a:t>
-            </a:r>
-            <a:r>
-              <a:rPr sz="1600" b="1" i="0">
-                <a:solidFill>
-                  <a:srgbClr val="2B2B2B"/>
-                </a:solidFill>
-                <a:latin typeface="Calibri"/>
-              </a:rPr>
-              <a:t>clasifica a mano los tickets</a:t>
-            </a:r>
-            <a:r>
-              <a:rPr sz="1600" b="0" i="0">
-                <a:solidFill>
-                  <a:srgbClr val="2B2B2B"/>
-                </a:solidFill>
-                <a:latin typeface="Calibri"/>
-              </a:rPr>
-              <a:t> de su mesa de ayuda y la atención se demora.</a:t>
-            </a:r>
-          </a:p>
-          <a:p>
-            <a:pPr lvl="1">
-              <a:spcAft>
-                <a:spcPts val="600"/>
-              </a:spcAft>
-            </a:pPr>
-            <a:r>
-              <a:rPr sz="1500" b="0" i="0">
-                <a:solidFill>
-                  <a:srgbClr val="2B2B2B"/>
-                </a:solidFill>
-                <a:latin typeface="Calibri"/>
-              </a:rPr>
-              <a:t>●   Pregunta del proyecto: ¿en qué medida un clasificador automático reduce el tiempo de atención de los tickets?</a:t>
-            </a:r>
-          </a:p>
-          <a:p>
-            <a:pPr>
-              <a:spcAft>
-                <a:spcPts val="1000"/>
-              </a:spcAft>
-            </a:pPr>
-            <a:r>
-              <a:rPr sz="1600" b="0" i="0">
-                <a:solidFill>
-                  <a:srgbClr val="2B2B2B"/>
-                </a:solidFill>
-                <a:latin typeface="Calibri"/>
-              </a:rPr>
-              <a:t>–   El </a:t>
-            </a:r>
-            <a:r>
-              <a:rPr sz="1600" b="1" i="0">
-                <a:solidFill>
-                  <a:srgbClr val="2B2B2B"/>
-                </a:solidFill>
-                <a:latin typeface="Calibri"/>
-              </a:rPr>
-              <a:t>diseño metodológico</a:t>
-            </a:r>
-            <a:r>
-              <a:rPr sz="1600" b="0" i="0">
-                <a:solidFill>
-                  <a:srgbClr val="2B2B2B"/>
-                </a:solidFill>
-                <a:latin typeface="Calibri"/>
-              </a:rPr>
-              <a:t> es el plan para conseguir y analizar la evidencia que responde esa pregunta.</a:t>
-            </a:r>
-          </a:p>
-          <a:p>
-            <a:pPr>
-              <a:spcAft>
-                <a:spcPts val="1000"/>
-              </a:spcAft>
-            </a:pPr>
-            <a:r>
-              <a:rPr sz="1600" b="0" i="0">
-                <a:solidFill>
-                  <a:srgbClr val="2B2B2B"/>
-                </a:solidFill>
-                <a:latin typeface="Calibri"/>
-              </a:rPr>
-              <a:t>–   Regla que atraviesa toda la sesión: en TG2 la metodología se </a:t>
-            </a:r>
-            <a:r>
-              <a:rPr sz="1600" b="1" i="0">
-                <a:solidFill>
-                  <a:srgbClr val="2B2B2B"/>
-                </a:solidFill>
-                <a:latin typeface="Calibri"/>
-              </a:rPr>
-              <a:t>propone</a:t>
-            </a:r>
-            <a:r>
-              <a:rPr sz="1600" b="0" i="0">
-                <a:solidFill>
-                  <a:srgbClr val="2B2B2B"/>
-                </a:solidFill>
-                <a:latin typeface="Calibri"/>
-              </a:rPr>
-              <a:t>; el trabajo de campo es de TG3.</a:t>
-            </a:r>
-          </a:p>
-          <a:p>
-            <a:pPr lvl="1">
-              <a:spcAft>
-                <a:spcPts val="600"/>
-              </a:spcAft>
-            </a:pPr>
-            <a:r>
-              <a:rPr sz="1500" b="0" i="0">
-                <a:solidFill>
-                  <a:srgbClr val="2B2B2B"/>
-                </a:solidFill>
-                <a:latin typeface="Calibri"/>
-              </a:rPr>
-              <a:t>●   Hoy se escribe 'se propone', 'se aplicará', 'se seleccionará'. Nunca 'se aplicó'.</a:t>
-            </a:r>
-          </a:p>
-        </p:txBody>
-      </p:sp>
-      <p:sp>
-        <p:nvSpPr>
-          <p:cNvPr id="5" name="TextBox 4"/>
-          <p:cNvSpPr txBox="1"/>
-          <p:nvPr/>
-        </p:nvSpPr>
-        <p:spPr>
-          <a:xfrm>
-            <a:off x="11094415" y="6446520"/>
-            <a:ext cx="548640" cy="274320"/>
-          </a:xfrm>
-          <a:prstGeom prst="rect">
-            <a:avLst/>
-          </a:prstGeom>
-          <a:noFill/>
-        </p:spPr>
-        <p:txBody>
-          <a:bodyPr wrap="square" anchor="t" lIns="0" rIns="0" tIns="0" bIns="0">
-            <a:spAutoFit/>
-          </a:bodyPr>
-          <a:lstStyle/>
-          <a:p>
-            <a:pPr algn="r"/>
-            <a:r>
-              <a:rPr sz="1000" b="1" i="0">
-                <a:solidFill>
-                  <a:srgbClr val="8F989D"/>
-                </a:solidFill>
-                <a:latin typeface="Calibri"/>
-              </a:rPr>
-              <a:t>2</a:t>
-            </a:r>
-          </a:p>
-        </p:txBody>
-      </p:sp>
-      <p:sp>
-        <p:nvSpPr>
-          <p:cNvPr id="6" name="TextBox 5"/>
-          <p:cNvSpPr txBox="1"/>
-          <p:nvPr/>
-        </p:nvSpPr>
-        <p:spPr>
-          <a:xfrm>
-            <a:off x="640080" y="5943600"/>
-            <a:ext cx="9997135" cy="457200"/>
-          </a:xfrm>
-          <a:prstGeom prst="rect">
-            <a:avLst/>
-          </a:prstGeom>
-          <a:noFill/>
-        </p:spPr>
-        <p:txBody>
-          <a:bodyPr wrap="square" anchor="t" lIns="0" rIns="0" tIns="0" bIns="0">
-            <a:spAutoFit/>
-          </a:bodyPr>
-          <a:lstStyle/>
-          <a:p>
-            <a:r>
-              <a:rPr sz="1200" b="0" i="1">
-                <a:solidFill>
-                  <a:srgbClr val="2B2B2B"/>
-                </a:solidFill>
-                <a:latin typeface="Calibri"/>
-              </a:rPr>
-              <a:t>Salida esperada de hoy: una ficha metodológica (enfoque + alcance + diseño) y una matriz pregunta–método completa.</a:t>
             </a:r>
           </a:p>
         </p:txBody>
